--- a/replication_presentation.pptx
+++ b/replication_presentation.pptx
@@ -5,7 +5,7 @@
     <p:sldMasterId id="2147483660" r:id="rId1"/>
   </p:sldMasterIdLst>
   <p:notesMasterIdLst>
-    <p:notesMasterId r:id="rId11"/>
+    <p:notesMasterId r:id="rId13"/>
   </p:notesMasterIdLst>
   <p:sldIdLst>
     <p:sldId id="257" r:id="rId2"/>
@@ -14,9 +14,11 @@
     <p:sldId id="264" r:id="rId5"/>
     <p:sldId id="265" r:id="rId6"/>
     <p:sldId id="259" r:id="rId7"/>
-    <p:sldId id="260" r:id="rId8"/>
-    <p:sldId id="261" r:id="rId9"/>
-    <p:sldId id="262" r:id="rId10"/>
+    <p:sldId id="267" r:id="rId8"/>
+    <p:sldId id="268" r:id="rId9"/>
+    <p:sldId id="269" r:id="rId10"/>
+    <p:sldId id="266" r:id="rId11"/>
+    <p:sldId id="262" r:id="rId12"/>
   </p:sldIdLst>
   <p:sldSz cx="12192000" cy="6858000"/>
   <p:notesSz cx="6858000" cy="9144000"/>
@@ -115,6 +117,11 @@
       </a:defRPr>
     </a:lvl9pPr>
   </p:defaultTextStyle>
+  <p:extLst>
+    <p:ext uri="{EFAFB233-063F-42B5-8137-9DF3F51BA10A}">
+      <p15:sldGuideLst xmlns:p15="http://schemas.microsoft.com/office/powerpoint/2012/main"/>
+    </p:ext>
+  </p:extLst>
 </p:presentation>
 </file>
 
@@ -200,7 +207,7 @@
           <a:p>
             <a:fld id="{7F7E69F3-E01A-734C-B9F4-76F16FAF78EC}" type="datetimeFigureOut">
               <a:rPr lang="en-DE" smtClean="0"/>
-              <a:t>28.01.26</a:t>
+              <a:t>01.02.26</a:t>
             </a:fld>
             <a:endParaRPr lang="en-DE"/>
           </a:p>
@@ -555,6 +562,174 @@
 </p:notes>
 </file>
 
+<file path=ppt/notesSlides/notesSlide10.xml><?xml version="1.0" encoding="utf-8"?>
+<p:notes xmlns:a="http://schemas.openxmlformats.org/drawingml/2006/main" xmlns:r="http://schemas.openxmlformats.org/officeDocument/2006/relationships" xmlns:p="http://schemas.openxmlformats.org/presentationml/2006/main">
+  <p:cSld>
+    <p:spTree>
+      <p:nvGrpSpPr>
+        <p:cNvPr id="1" name=""/>
+        <p:cNvGrpSpPr/>
+        <p:nvPr/>
+      </p:nvGrpSpPr>
+      <p:grpSpPr>
+        <a:xfrm>
+          <a:off x="0" y="0"/>
+          <a:ext cx="0" cy="0"/>
+          <a:chOff x="0" y="0"/>
+          <a:chExt cx="0" cy="0"/>
+        </a:xfrm>
+      </p:grpSpPr>
+      <p:sp>
+        <p:nvSpPr>
+          <p:cNvPr id="2" name="Slide Image Placeholder 1"/>
+          <p:cNvSpPr>
+            <a:spLocks noGrp="1" noRot="1" noChangeAspect="1"/>
+          </p:cNvSpPr>
+          <p:nvPr>
+            <p:ph type="sldImg"/>
+          </p:nvPr>
+        </p:nvSpPr>
+        <p:spPr/>
+      </p:sp>
+      <p:sp>
+        <p:nvSpPr>
+          <p:cNvPr id="3" name="Notes Placeholder 2"/>
+          <p:cNvSpPr>
+            <a:spLocks noGrp="1"/>
+          </p:cNvSpPr>
+          <p:nvPr>
+            <p:ph type="body" idx="1"/>
+          </p:nvPr>
+        </p:nvSpPr>
+        <p:spPr/>
+        <p:txBody>
+          <a:bodyPr/>
+          <a:lstStyle/>
+          <a:p>
+            <a:endParaRPr lang="en-DE" dirty="0"/>
+          </a:p>
+        </p:txBody>
+      </p:sp>
+      <p:sp>
+        <p:nvSpPr>
+          <p:cNvPr id="4" name="Slide Number Placeholder 3"/>
+          <p:cNvSpPr>
+            <a:spLocks noGrp="1"/>
+          </p:cNvSpPr>
+          <p:nvPr>
+            <p:ph type="sldNum" sz="quarter" idx="5"/>
+          </p:nvPr>
+        </p:nvSpPr>
+        <p:spPr/>
+        <p:txBody>
+          <a:bodyPr/>
+          <a:lstStyle/>
+          <a:p>
+            <a:fld id="{51DE4EB9-60C9-1641-9311-3E3AA9FE5E93}" type="slidenum">
+              <a:rPr lang="en-DE" smtClean="0"/>
+              <a:t>10</a:t>
+            </a:fld>
+            <a:endParaRPr lang="en-DE"/>
+          </a:p>
+        </p:txBody>
+      </p:sp>
+    </p:spTree>
+    <p:extLst>
+      <p:ext uri="{BB962C8B-B14F-4D97-AF65-F5344CB8AC3E}">
+        <p14:creationId xmlns:p14="http://schemas.microsoft.com/office/powerpoint/2010/main" val="1251297992"/>
+      </p:ext>
+    </p:extLst>
+  </p:cSld>
+  <p:clrMapOvr>
+    <a:masterClrMapping/>
+  </p:clrMapOvr>
+</p:notes>
+</file>
+
+<file path=ppt/notesSlides/notesSlide11.xml><?xml version="1.0" encoding="utf-8"?>
+<p:notes xmlns:a="http://schemas.openxmlformats.org/drawingml/2006/main" xmlns:r="http://schemas.openxmlformats.org/officeDocument/2006/relationships" xmlns:p="http://schemas.openxmlformats.org/presentationml/2006/main">
+  <p:cSld>
+    <p:spTree>
+      <p:nvGrpSpPr>
+        <p:cNvPr id="1" name=""/>
+        <p:cNvGrpSpPr/>
+        <p:nvPr/>
+      </p:nvGrpSpPr>
+      <p:grpSpPr>
+        <a:xfrm>
+          <a:off x="0" y="0"/>
+          <a:ext cx="0" cy="0"/>
+          <a:chOff x="0" y="0"/>
+          <a:chExt cx="0" cy="0"/>
+        </a:xfrm>
+      </p:grpSpPr>
+      <p:sp>
+        <p:nvSpPr>
+          <p:cNvPr id="2" name="Slide Image Placeholder 1"/>
+          <p:cNvSpPr>
+            <a:spLocks noGrp="1" noRot="1" noChangeAspect="1"/>
+          </p:cNvSpPr>
+          <p:nvPr>
+            <p:ph type="sldImg"/>
+          </p:nvPr>
+        </p:nvSpPr>
+        <p:spPr/>
+      </p:sp>
+      <p:sp>
+        <p:nvSpPr>
+          <p:cNvPr id="3" name="Notes Placeholder 2"/>
+          <p:cNvSpPr>
+            <a:spLocks noGrp="1"/>
+          </p:cNvSpPr>
+          <p:nvPr>
+            <p:ph type="body" idx="1"/>
+          </p:nvPr>
+        </p:nvSpPr>
+        <p:spPr/>
+        <p:txBody>
+          <a:bodyPr/>
+          <a:lstStyle/>
+          <a:p>
+            <a:endParaRPr lang="en-DE" dirty="0"/>
+          </a:p>
+        </p:txBody>
+      </p:sp>
+      <p:sp>
+        <p:nvSpPr>
+          <p:cNvPr id="4" name="Slide Number Placeholder 3"/>
+          <p:cNvSpPr>
+            <a:spLocks noGrp="1"/>
+          </p:cNvSpPr>
+          <p:nvPr>
+            <p:ph type="sldNum" sz="quarter" idx="5"/>
+          </p:nvPr>
+        </p:nvSpPr>
+        <p:spPr/>
+        <p:txBody>
+          <a:bodyPr/>
+          <a:lstStyle/>
+          <a:p>
+            <a:fld id="{51DE4EB9-60C9-1641-9311-3E3AA9FE5E93}" type="slidenum">
+              <a:rPr lang="en-DE" smtClean="0"/>
+              <a:t>11</a:t>
+            </a:fld>
+            <a:endParaRPr lang="en-DE"/>
+          </a:p>
+        </p:txBody>
+      </p:sp>
+    </p:spTree>
+    <p:extLst>
+      <p:ext uri="{BB962C8B-B14F-4D97-AF65-F5344CB8AC3E}">
+        <p14:creationId xmlns:p14="http://schemas.microsoft.com/office/powerpoint/2010/main" val="628477870"/>
+      </p:ext>
+    </p:extLst>
+  </p:cSld>
+  <p:clrMapOvr>
+    <a:masterClrMapping/>
+  </p:clrMapOvr>
+</p:notes>
+</file>
+
 <file path=ppt/notesSlides/notesSlide2.xml><?xml version="1.0" encoding="utf-8"?>
 <p:notes xmlns:a="http://schemas.openxmlformats.org/drawingml/2006/main" xmlns:r="http://schemas.openxmlformats.org/officeDocument/2006/relationships" xmlns:p="http://schemas.openxmlformats.org/presentationml/2006/main">
   <p:cSld>
@@ -1212,7 +1387,13 @@
   <p:cSld>
     <p:spTree>
       <p:nvGrpSpPr>
-        <p:cNvPr id="1" name=""/>
+        <p:cNvPr id="1" name="">
+          <a:extLst>
+            <a:ext uri="{FF2B5EF4-FFF2-40B4-BE49-F238E27FC236}">
+              <a16:creationId xmlns:a16="http://schemas.microsoft.com/office/drawing/2014/main" id="{23D30691-F1E2-7A12-553F-B2FF4F98A20C}"/>
+            </a:ext>
+          </a:extLst>
+        </p:cNvPr>
         <p:cNvGrpSpPr/>
         <p:nvPr/>
       </p:nvGrpSpPr>
@@ -1226,7 +1407,13 @@
       </p:grpSpPr>
       <p:sp>
         <p:nvSpPr>
-          <p:cNvPr id="2" name="Slide Image Placeholder 1"/>
+          <p:cNvPr id="2" name="Slide Image Placeholder 1">
+            <a:extLst>
+              <a:ext uri="{FF2B5EF4-FFF2-40B4-BE49-F238E27FC236}">
+                <a16:creationId xmlns:a16="http://schemas.microsoft.com/office/drawing/2014/main" id="{28ADC963-C276-D18A-7B18-61737B420184}"/>
+              </a:ext>
+            </a:extLst>
+          </p:cNvPr>
           <p:cNvSpPr>
             <a:spLocks noGrp="1" noRot="1" noChangeAspect="1"/>
           </p:cNvSpPr>
@@ -1238,7 +1425,13 @@
       </p:sp>
       <p:sp>
         <p:nvSpPr>
-          <p:cNvPr id="3" name="Notes Placeholder 2"/>
+          <p:cNvPr id="3" name="Notes Placeholder 2">
+            <a:extLst>
+              <a:ext uri="{FF2B5EF4-FFF2-40B4-BE49-F238E27FC236}">
+                <a16:creationId xmlns:a16="http://schemas.microsoft.com/office/drawing/2014/main" id="{FF996DF8-119A-B211-DD0C-CF01E8B62C04}"/>
+              </a:ext>
+            </a:extLst>
+          </p:cNvPr>
           <p:cNvSpPr>
             <a:spLocks noGrp="1"/>
           </p:cNvSpPr>
@@ -1251,13 +1444,50 @@
           <a:bodyPr/>
           <a:lstStyle/>
           <a:p>
+            <a:r>
+              <a:rPr lang="en-DE" dirty="0"/>
+              <a:t>Participant </a:t>
+            </a:r>
+            <a:r>
+              <a:rPr lang="en-GB" dirty="0"/>
+              <a:t>I</a:t>
+            </a:r>
             <a:endParaRPr lang="en-DE" dirty="0"/>
           </a:p>
-        </p:txBody>
-      </p:sp>
-      <p:sp>
-        <p:nvSpPr>
-          <p:cNvPr id="4" name="Slide Number Placeholder 3"/>
+          <a:p>
+            <a:r>
+              <a:rPr lang="en-GB" dirty="0"/>
+              <a:t>Q</a:t>
+            </a:r>
+            <a:r>
+              <a:rPr lang="en-DE" dirty="0"/>
+              <a:t>uestion topic q</a:t>
+            </a:r>
+          </a:p>
+          <a:p>
+            <a:r>
+              <a:rPr lang="en-GB" dirty="0"/>
+              <a:t>R</a:t>
+            </a:r>
+            <a:r>
+              <a:rPr lang="en-DE" dirty="0"/>
+              <a:t>ound r</a:t>
+            </a:r>
+          </a:p>
+          <a:p>
+            <a:endParaRPr lang="en-DE" dirty="0"/>
+          </a:p>
+        </p:txBody>
+      </p:sp>
+      <p:sp>
+        <p:nvSpPr>
+          <p:cNvPr id="4" name="Slide Number Placeholder 3">
+            <a:extLst>
+              <a:ext uri="{FF2B5EF4-FFF2-40B4-BE49-F238E27FC236}">
+                <a16:creationId xmlns:a16="http://schemas.microsoft.com/office/drawing/2014/main" id="{6F9C71DB-D1BD-DD4C-DE2B-D217A32442B1}"/>
+              </a:ext>
+            </a:extLst>
+          </p:cNvPr>
           <p:cNvSpPr>
             <a:spLocks noGrp="1"/>
           </p:cNvSpPr>
@@ -1281,7 +1511,7 @@
     </p:spTree>
     <p:extLst>
       <p:ext uri="{BB962C8B-B14F-4D97-AF65-F5344CB8AC3E}">
-        <p14:creationId xmlns:p14="http://schemas.microsoft.com/office/powerpoint/2010/main" val="3801129860"/>
+        <p14:creationId xmlns:p14="http://schemas.microsoft.com/office/powerpoint/2010/main" val="1528103802"/>
       </p:ext>
     </p:extLst>
   </p:cSld>
@@ -1296,7 +1526,13 @@
   <p:cSld>
     <p:spTree>
       <p:nvGrpSpPr>
-        <p:cNvPr id="1" name=""/>
+        <p:cNvPr id="1" name="">
+          <a:extLst>
+            <a:ext uri="{FF2B5EF4-FFF2-40B4-BE49-F238E27FC236}">
+              <a16:creationId xmlns:a16="http://schemas.microsoft.com/office/drawing/2014/main" id="{91F34819-81D9-B43A-AAEE-8228DE8951BC}"/>
+            </a:ext>
+          </a:extLst>
+        </p:cNvPr>
         <p:cNvGrpSpPr/>
         <p:nvPr/>
       </p:nvGrpSpPr>
@@ -1310,7 +1546,13 @@
       </p:grpSpPr>
       <p:sp>
         <p:nvSpPr>
-          <p:cNvPr id="2" name="Slide Image Placeholder 1"/>
+          <p:cNvPr id="2" name="Slide Image Placeholder 1">
+            <a:extLst>
+              <a:ext uri="{FF2B5EF4-FFF2-40B4-BE49-F238E27FC236}">
+                <a16:creationId xmlns:a16="http://schemas.microsoft.com/office/drawing/2014/main" id="{FC396B3C-82C3-1441-D4DB-F9669E22CEF8}"/>
+              </a:ext>
+            </a:extLst>
+          </p:cNvPr>
           <p:cNvSpPr>
             <a:spLocks noGrp="1" noRot="1" noChangeAspect="1"/>
           </p:cNvSpPr>
@@ -1322,7 +1564,13 @@
       </p:sp>
       <p:sp>
         <p:nvSpPr>
-          <p:cNvPr id="3" name="Notes Placeholder 2"/>
+          <p:cNvPr id="3" name="Notes Placeholder 2">
+            <a:extLst>
+              <a:ext uri="{FF2B5EF4-FFF2-40B4-BE49-F238E27FC236}">
+                <a16:creationId xmlns:a16="http://schemas.microsoft.com/office/drawing/2014/main" id="{F833D996-8016-B438-57B3-C7352149B0E3}"/>
+              </a:ext>
+            </a:extLst>
+          </p:cNvPr>
           <p:cNvSpPr>
             <a:spLocks noGrp="1"/>
           </p:cNvSpPr>
@@ -1341,7 +1589,121 @@
       </p:sp>
       <p:sp>
         <p:nvSpPr>
-          <p:cNvPr id="4" name="Slide Number Placeholder 3"/>
+          <p:cNvPr id="4" name="Slide Number Placeholder 3">
+            <a:extLst>
+              <a:ext uri="{FF2B5EF4-FFF2-40B4-BE49-F238E27FC236}">
+                <a16:creationId xmlns:a16="http://schemas.microsoft.com/office/drawing/2014/main" id="{CFE6523F-C24E-9C28-75DA-A3BA0E0A87E0}"/>
+              </a:ext>
+            </a:extLst>
+          </p:cNvPr>
+          <p:cNvSpPr>
+            <a:spLocks noGrp="1"/>
+          </p:cNvSpPr>
+          <p:nvPr>
+            <p:ph type="sldNum" sz="quarter" idx="5"/>
+          </p:nvPr>
+        </p:nvSpPr>
+        <p:spPr/>
+        <p:txBody>
+          <a:bodyPr/>
+          <a:lstStyle/>
+          <a:p>
+            <a:fld id="{51DE4EB9-60C9-1641-9311-3E3AA9FE5E93}" type="slidenum">
+              <a:rPr lang="en-DE" smtClean="0"/>
+              <a:t>8</a:t>
+            </a:fld>
+            <a:endParaRPr lang="en-DE"/>
+          </a:p>
+        </p:txBody>
+      </p:sp>
+    </p:spTree>
+    <p:extLst>
+      <p:ext uri="{BB962C8B-B14F-4D97-AF65-F5344CB8AC3E}">
+        <p14:creationId xmlns:p14="http://schemas.microsoft.com/office/powerpoint/2010/main" val="920723390"/>
+      </p:ext>
+    </p:extLst>
+  </p:cSld>
+  <p:clrMapOvr>
+    <a:masterClrMapping/>
+  </p:clrMapOvr>
+</p:notes>
+</file>
+
+<file path=ppt/notesSlides/notesSlide9.xml><?xml version="1.0" encoding="utf-8"?>
+<p:notes xmlns:a="http://schemas.openxmlformats.org/drawingml/2006/main" xmlns:r="http://schemas.openxmlformats.org/officeDocument/2006/relationships" xmlns:p="http://schemas.openxmlformats.org/presentationml/2006/main">
+  <p:cSld>
+    <p:spTree>
+      <p:nvGrpSpPr>
+        <p:cNvPr id="1" name="">
+          <a:extLst>
+            <a:ext uri="{FF2B5EF4-FFF2-40B4-BE49-F238E27FC236}">
+              <a16:creationId xmlns:a16="http://schemas.microsoft.com/office/drawing/2014/main" id="{5F3B0637-9F6F-2260-26EC-022AA4C26956}"/>
+            </a:ext>
+          </a:extLst>
+        </p:cNvPr>
+        <p:cNvGrpSpPr/>
+        <p:nvPr/>
+      </p:nvGrpSpPr>
+      <p:grpSpPr>
+        <a:xfrm>
+          <a:off x="0" y="0"/>
+          <a:ext cx="0" cy="0"/>
+          <a:chOff x="0" y="0"/>
+          <a:chExt cx="0" cy="0"/>
+        </a:xfrm>
+      </p:grpSpPr>
+      <p:sp>
+        <p:nvSpPr>
+          <p:cNvPr id="2" name="Slide Image Placeholder 1">
+            <a:extLst>
+              <a:ext uri="{FF2B5EF4-FFF2-40B4-BE49-F238E27FC236}">
+                <a16:creationId xmlns:a16="http://schemas.microsoft.com/office/drawing/2014/main" id="{B9045CA6-C959-69FB-A3EB-D5989341F6B7}"/>
+              </a:ext>
+            </a:extLst>
+          </p:cNvPr>
+          <p:cNvSpPr>
+            <a:spLocks noGrp="1" noRot="1" noChangeAspect="1"/>
+          </p:cNvSpPr>
+          <p:nvPr>
+            <p:ph type="sldImg"/>
+          </p:nvPr>
+        </p:nvSpPr>
+        <p:spPr/>
+      </p:sp>
+      <p:sp>
+        <p:nvSpPr>
+          <p:cNvPr id="3" name="Notes Placeholder 2">
+            <a:extLst>
+              <a:ext uri="{FF2B5EF4-FFF2-40B4-BE49-F238E27FC236}">
+                <a16:creationId xmlns:a16="http://schemas.microsoft.com/office/drawing/2014/main" id="{A60FE0E2-EDCB-C90B-4C1B-88085B3F9B6B}"/>
+              </a:ext>
+            </a:extLst>
+          </p:cNvPr>
+          <p:cNvSpPr>
+            <a:spLocks noGrp="1"/>
+          </p:cNvSpPr>
+          <p:nvPr>
+            <p:ph type="body" idx="1"/>
+          </p:nvPr>
+        </p:nvSpPr>
+        <p:spPr/>
+        <p:txBody>
+          <a:bodyPr/>
+          <a:lstStyle/>
+          <a:p>
+            <a:endParaRPr lang="en-DE" dirty="0"/>
+          </a:p>
+        </p:txBody>
+      </p:sp>
+      <p:sp>
+        <p:nvSpPr>
+          <p:cNvPr id="4" name="Slide Number Placeholder 3">
+            <a:extLst>
+              <a:ext uri="{FF2B5EF4-FFF2-40B4-BE49-F238E27FC236}">
+                <a16:creationId xmlns:a16="http://schemas.microsoft.com/office/drawing/2014/main" id="{735EE59A-E30A-570A-5E9A-452AA8E41BE8}"/>
+              </a:ext>
+            </a:extLst>
+          </p:cNvPr>
           <p:cNvSpPr>
             <a:spLocks noGrp="1"/>
           </p:cNvSpPr>
@@ -1365,7 +1727,7 @@
     </p:spTree>
     <p:extLst>
       <p:ext uri="{BB962C8B-B14F-4D97-AF65-F5344CB8AC3E}">
-        <p14:creationId xmlns:p14="http://schemas.microsoft.com/office/powerpoint/2010/main" val="628477870"/>
+        <p14:creationId xmlns:p14="http://schemas.microsoft.com/office/powerpoint/2010/main" val="619535107"/>
       </p:ext>
     </p:extLst>
   </p:cSld>
@@ -1506,7 +1868,7 @@
           <a:p>
             <a:fld id="{A4084EF6-DEF1-E94D-B390-E1846AA13E25}" type="datetimeFigureOut">
               <a:rPr lang="en-DE" smtClean="0"/>
-              <a:t>28.01.26</a:t>
+              <a:t>01.02.26</a:t>
             </a:fld>
             <a:endParaRPr lang="en-DE"/>
           </a:p>
@@ -1676,7 +2038,7 @@
           <a:p>
             <a:fld id="{A4084EF6-DEF1-E94D-B390-E1846AA13E25}" type="datetimeFigureOut">
               <a:rPr lang="en-DE" smtClean="0"/>
-              <a:t>28.01.26</a:t>
+              <a:t>01.02.26</a:t>
             </a:fld>
             <a:endParaRPr lang="en-DE"/>
           </a:p>
@@ -1856,7 +2218,7 @@
           <a:p>
             <a:fld id="{A4084EF6-DEF1-E94D-B390-E1846AA13E25}" type="datetimeFigureOut">
               <a:rPr lang="en-DE" smtClean="0"/>
-              <a:t>28.01.26</a:t>
+              <a:t>01.02.26</a:t>
             </a:fld>
             <a:endParaRPr lang="en-DE"/>
           </a:p>
@@ -2026,7 +2388,7 @@
           <a:p>
             <a:fld id="{A4084EF6-DEF1-E94D-B390-E1846AA13E25}" type="datetimeFigureOut">
               <a:rPr lang="en-DE" smtClean="0"/>
-              <a:t>28.01.26</a:t>
+              <a:t>01.02.26</a:t>
             </a:fld>
             <a:endParaRPr lang="en-DE"/>
           </a:p>
@@ -2272,7 +2634,7 @@
           <a:p>
             <a:fld id="{A4084EF6-DEF1-E94D-B390-E1846AA13E25}" type="datetimeFigureOut">
               <a:rPr lang="en-DE" smtClean="0"/>
-              <a:t>28.01.26</a:t>
+              <a:t>01.02.26</a:t>
             </a:fld>
             <a:endParaRPr lang="en-DE"/>
           </a:p>
@@ -2504,7 +2866,7 @@
           <a:p>
             <a:fld id="{A4084EF6-DEF1-E94D-B390-E1846AA13E25}" type="datetimeFigureOut">
               <a:rPr lang="en-DE" smtClean="0"/>
-              <a:t>28.01.26</a:t>
+              <a:t>01.02.26</a:t>
             </a:fld>
             <a:endParaRPr lang="en-DE"/>
           </a:p>
@@ -2871,7 +3233,7 @@
           <a:p>
             <a:fld id="{A4084EF6-DEF1-E94D-B390-E1846AA13E25}" type="datetimeFigureOut">
               <a:rPr lang="en-DE" smtClean="0"/>
-              <a:t>28.01.26</a:t>
+              <a:t>01.02.26</a:t>
             </a:fld>
             <a:endParaRPr lang="en-DE"/>
           </a:p>
@@ -2989,7 +3351,7 @@
           <a:p>
             <a:fld id="{A4084EF6-DEF1-E94D-B390-E1846AA13E25}" type="datetimeFigureOut">
               <a:rPr lang="en-DE" smtClean="0"/>
-              <a:t>28.01.26</a:t>
+              <a:t>01.02.26</a:t>
             </a:fld>
             <a:endParaRPr lang="en-DE"/>
           </a:p>
@@ -3084,7 +3446,7 @@
           <a:p>
             <a:fld id="{A4084EF6-DEF1-E94D-B390-E1846AA13E25}" type="datetimeFigureOut">
               <a:rPr lang="en-DE" smtClean="0"/>
-              <a:t>28.01.26</a:t>
+              <a:t>01.02.26</a:t>
             </a:fld>
             <a:endParaRPr lang="en-DE"/>
           </a:p>
@@ -3361,7 +3723,7 @@
           <a:p>
             <a:fld id="{A4084EF6-DEF1-E94D-B390-E1846AA13E25}" type="datetimeFigureOut">
               <a:rPr lang="en-DE" smtClean="0"/>
-              <a:t>28.01.26</a:t>
+              <a:t>01.02.26</a:t>
             </a:fld>
             <a:endParaRPr lang="en-DE"/>
           </a:p>
@@ -3618,7 +3980,7 @@
           <a:p>
             <a:fld id="{A4084EF6-DEF1-E94D-B390-E1846AA13E25}" type="datetimeFigureOut">
               <a:rPr lang="en-DE" smtClean="0"/>
-              <a:t>28.01.26</a:t>
+              <a:t>01.02.26</a:t>
             </a:fld>
             <a:endParaRPr lang="en-DE"/>
           </a:p>
@@ -3683,9 +4045,12 @@
 <p:sldMaster xmlns:a="http://schemas.openxmlformats.org/drawingml/2006/main" xmlns:r="http://schemas.openxmlformats.org/officeDocument/2006/relationships" xmlns:p="http://schemas.openxmlformats.org/presentationml/2006/main">
   <p:cSld>
     <p:bg>
-      <p:bgRef idx="1001">
-        <a:schemeClr val="bg1"/>
-      </p:bgRef>
+      <p:bgPr>
+        <a:solidFill>
+          <a:srgbClr val="121212"/>
+        </a:solidFill>
+        <a:effectLst/>
+      </p:bgPr>
     </p:bg>
     <p:spTree>
       <p:nvGrpSpPr>
@@ -3761,35 +4126,35 @@
           <a:p>
             <a:pPr lvl="0"/>
             <a:r>
-              <a:rPr lang="en-GB"/>
+              <a:rPr lang="en-GB" dirty="0"/>
               <a:t>Click to edit Master text styles</a:t>
             </a:r>
           </a:p>
           <a:p>
             <a:pPr lvl="1"/>
             <a:r>
-              <a:rPr lang="en-GB"/>
+              <a:rPr lang="en-GB" dirty="0"/>
               <a:t>Second level</a:t>
             </a:r>
           </a:p>
           <a:p>
             <a:pPr lvl="2"/>
             <a:r>
-              <a:rPr lang="en-GB"/>
+              <a:rPr lang="en-GB" dirty="0"/>
               <a:t>Third level</a:t>
             </a:r>
           </a:p>
           <a:p>
             <a:pPr lvl="3"/>
             <a:r>
-              <a:rPr lang="en-GB"/>
+              <a:rPr lang="en-GB" dirty="0"/>
               <a:t>Fourth level</a:t>
             </a:r>
           </a:p>
           <a:p>
             <a:pPr lvl="4"/>
             <a:r>
-              <a:rPr lang="en-GB"/>
+              <a:rPr lang="en-GB" dirty="0"/>
               <a:t>Fifth level</a:t>
             </a:r>
             <a:endParaRPr lang="en-US" dirty="0"/>
@@ -3831,7 +4196,7 @@
           <a:p>
             <a:fld id="{A4084EF6-DEF1-E94D-B390-E1846AA13E25}" type="datetimeFigureOut">
               <a:rPr lang="en-DE" smtClean="0"/>
-              <a:t>28.01.26</a:t>
+              <a:t>01.02.26</a:t>
             </a:fld>
             <a:endParaRPr lang="en-DE"/>
           </a:p>
@@ -4225,7 +4590,7 @@
     <p:bg>
       <p:bgPr>
         <a:solidFill>
-          <a:schemeClr val="bg1"/>
+          <a:srgbClr val="121212"/>
         </a:solidFill>
         <a:effectLst/>
       </p:bgPr>
@@ -4275,7 +4640,7 @@
         </p:blipFill>
         <p:spPr>
           <a:xfrm>
-            <a:off x="20" y="10"/>
+            <a:off x="20" y="2348"/>
             <a:ext cx="12191980" cy="6857990"/>
           </a:xfrm>
           <a:prstGeom prst="rect">
@@ -4368,6 +4733,173 @@
     <p:extLst>
       <p:ext uri="{BB962C8B-B14F-4D97-AF65-F5344CB8AC3E}">
         <p14:creationId xmlns:p14="http://schemas.microsoft.com/office/powerpoint/2010/main" val="2920465297"/>
+      </p:ext>
+    </p:extLst>
+  </p:cSld>
+  <p:clrMapOvr>
+    <a:masterClrMapping/>
+  </p:clrMapOvr>
+</p:sld>
+</file>
+
+<file path=ppt/slides/slide10.xml><?xml version="1.0" encoding="utf-8"?>
+<p:sld xmlns:a="http://schemas.openxmlformats.org/drawingml/2006/main" xmlns:r="http://schemas.openxmlformats.org/officeDocument/2006/relationships" xmlns:p="http://schemas.openxmlformats.org/presentationml/2006/main">
+  <p:cSld>
+    <p:spTree>
+      <p:nvGrpSpPr>
+        <p:cNvPr id="1" name=""/>
+        <p:cNvGrpSpPr/>
+        <p:nvPr/>
+      </p:nvGrpSpPr>
+      <p:grpSpPr>
+        <a:xfrm>
+          <a:off x="0" y="0"/>
+          <a:ext cx="0" cy="0"/>
+          <a:chOff x="0" y="0"/>
+          <a:chExt cx="0" cy="0"/>
+        </a:xfrm>
+      </p:grpSpPr>
+      <p:pic>
+        <p:nvPicPr>
+          <p:cNvPr id="8" name="Picture 7" descr="A graph of different colored rectangular shapes&#10;&#10;AI-generated content may be incorrect.">
+            <a:extLst>
+              <a:ext uri="{FF2B5EF4-FFF2-40B4-BE49-F238E27FC236}">
+                <a16:creationId xmlns:a16="http://schemas.microsoft.com/office/drawing/2014/main" id="{00BF3EEA-86F6-5A2B-8AEF-50E3F97A2B50}"/>
+              </a:ext>
+            </a:extLst>
+          </p:cNvPr>
+          <p:cNvPicPr>
+            <a:picLocks noChangeAspect="1"/>
+          </p:cNvPicPr>
+          <p:nvPr/>
+        </p:nvPicPr>
+        <p:blipFill>
+          <a:blip r:embed="rId3"/>
+          <a:stretch>
+            <a:fillRect/>
+          </a:stretch>
+        </p:blipFill>
+        <p:spPr>
+          <a:xfrm>
+            <a:off x="1396079" y="121744"/>
+            <a:ext cx="8949487" cy="6614512"/>
+          </a:xfrm>
+          <a:prstGeom prst="rect">
+            <a:avLst/>
+          </a:prstGeom>
+        </p:spPr>
+      </p:pic>
+    </p:spTree>
+    <p:extLst>
+      <p:ext uri="{BB962C8B-B14F-4D97-AF65-F5344CB8AC3E}">
+        <p14:creationId xmlns:p14="http://schemas.microsoft.com/office/powerpoint/2010/main" val="1150516757"/>
+      </p:ext>
+    </p:extLst>
+  </p:cSld>
+  <p:clrMapOvr>
+    <a:masterClrMapping/>
+  </p:clrMapOvr>
+</p:sld>
+</file>
+
+<file path=ppt/slides/slide11.xml><?xml version="1.0" encoding="utf-8"?>
+<p:sld xmlns:a="http://schemas.openxmlformats.org/drawingml/2006/main" xmlns:r="http://schemas.openxmlformats.org/officeDocument/2006/relationships" xmlns:p="http://schemas.openxmlformats.org/presentationml/2006/main">
+  <p:cSld>
+    <p:spTree>
+      <p:nvGrpSpPr>
+        <p:cNvPr id="1" name="">
+          <a:extLst>
+            <a:ext uri="{FF2B5EF4-FFF2-40B4-BE49-F238E27FC236}">
+              <a16:creationId xmlns:a16="http://schemas.microsoft.com/office/drawing/2014/main" id="{D9038F16-A74B-D157-7A79-31BC30588C8C}"/>
+            </a:ext>
+          </a:extLst>
+        </p:cNvPr>
+        <p:cNvGrpSpPr/>
+        <p:nvPr/>
+      </p:nvGrpSpPr>
+      <p:grpSpPr>
+        <a:xfrm>
+          <a:off x="0" y="0"/>
+          <a:ext cx="0" cy="0"/>
+          <a:chOff x="0" y="0"/>
+          <a:chExt cx="0" cy="0"/>
+        </a:xfrm>
+      </p:grpSpPr>
+      <p:sp>
+        <p:nvSpPr>
+          <p:cNvPr id="2" name="Title 1">
+            <a:extLst>
+              <a:ext uri="{FF2B5EF4-FFF2-40B4-BE49-F238E27FC236}">
+                <a16:creationId xmlns:a16="http://schemas.microsoft.com/office/drawing/2014/main" id="{54A786B3-B22A-C475-B8C6-4B02A5EBA9D3}"/>
+              </a:ext>
+            </a:extLst>
+          </p:cNvPr>
+          <p:cNvSpPr>
+            <a:spLocks noGrp="1"/>
+          </p:cNvSpPr>
+          <p:nvPr>
+            <p:ph type="title"/>
+          </p:nvPr>
+        </p:nvSpPr>
+        <p:spPr/>
+        <p:txBody>
+          <a:bodyPr/>
+          <a:lstStyle/>
+          <a:p>
+            <a:r>
+              <a:rPr lang="en-DE" dirty="0"/>
+              <a:t>Verdict &amp; Hypothesis</a:t>
+            </a:r>
+          </a:p>
+        </p:txBody>
+      </p:sp>
+      <p:sp>
+        <p:nvSpPr>
+          <p:cNvPr id="4" name="Content Placeholder 3">
+            <a:extLst>
+              <a:ext uri="{FF2B5EF4-FFF2-40B4-BE49-F238E27FC236}">
+                <a16:creationId xmlns:a16="http://schemas.microsoft.com/office/drawing/2014/main" id="{ADCBA40C-CD97-B539-5821-26C7CFB800B5}"/>
+              </a:ext>
+            </a:extLst>
+          </p:cNvPr>
+          <p:cNvSpPr>
+            <a:spLocks noGrp="1"/>
+          </p:cNvSpPr>
+          <p:nvPr>
+            <p:ph idx="1"/>
+          </p:nvPr>
+        </p:nvSpPr>
+        <p:spPr/>
+        <p:txBody>
+          <a:bodyPr/>
+          <a:lstStyle/>
+          <a:p>
+            <a:r>
+              <a:rPr lang="en-DE" dirty="0"/>
+              <a:t>We see that people do not engage in motivated reasoning when receiving good news, they hold their beliefs  </a:t>
+            </a:r>
+          </a:p>
+          <a:p>
+            <a:pPr lvl="1"/>
+            <a:r>
+              <a:rPr lang="en-GB" dirty="0"/>
+              <a:t>Motivated reasoning does not arise from wanting the world to be good.</a:t>
+            </a:r>
+            <a:br>
+              <a:rPr lang="en-GB" dirty="0"/>
+            </a:br>
+            <a:r>
+              <a:rPr lang="en-GB" dirty="0"/>
+              <a:t>It arises when beliefs serve identity, ego, or strategic function.</a:t>
+            </a:r>
+            <a:endParaRPr lang="en-DE" dirty="0"/>
+          </a:p>
+        </p:txBody>
+      </p:sp>
+    </p:spTree>
+    <p:extLst>
+      <p:ext uri="{BB962C8B-B14F-4D97-AF65-F5344CB8AC3E}">
+        <p14:creationId xmlns:p14="http://schemas.microsoft.com/office/powerpoint/2010/main" val="330628484"/>
       </p:ext>
     </p:extLst>
   </p:cSld>
@@ -4574,8 +5106,8 @@
         </p:nvSpPr>
         <p:spPr>
           <a:xfrm>
-            <a:off x="2030496" y="2274838"/>
-            <a:ext cx="8131008" cy="2308324"/>
+            <a:off x="1539289" y="2614904"/>
+            <a:ext cx="9507731" cy="1477328"/>
           </a:xfrm>
           <a:prstGeom prst="rect">
             <a:avLst/>
@@ -4589,52 +5121,26 @@
           <a:lstStyle/>
           <a:p>
             <a:r>
-              <a:rPr lang="en-GB" i="1" dirty="0"/>
-              <a:t>Acute Myeloid </a:t>
-            </a:r>
-            <a:r>
-              <a:rPr lang="en-GB" i="1" dirty="0" err="1"/>
-              <a:t>Leukemia</a:t>
-            </a:r>
-            <a:r>
-              <a:rPr lang="en-GB" i="1" dirty="0"/>
-              <a:t> (AML) is a devastating illness in which cancerous cells</a:t>
-            </a:r>
-          </a:p>
-          <a:p>
-            <a:r>
-              <a:rPr lang="en-GB" i="1" dirty="0"/>
-              <a:t>emerge in the bone marrow, invade the blood stream, and may spread to the rest</a:t>
-            </a:r>
-          </a:p>
-          <a:p>
-            <a:r>
-              <a:rPr lang="en-GB" i="1" dirty="0"/>
-              <a:t>of the body. Tragically, hundreds to thousands of children under the age of 15</a:t>
-            </a:r>
-          </a:p>
-          <a:p>
-            <a:r>
-              <a:rPr lang="en-GB" i="1" dirty="0"/>
-              <a:t>are diagnosed with AML each year; it is one of the most common cancers among</a:t>
-            </a:r>
-          </a:p>
-          <a:p>
-            <a:r>
-              <a:rPr lang="en-GB" i="1" dirty="0"/>
-              <a:t>children.</a:t>
-            </a:r>
-          </a:p>
-          <a:p>
-            <a:r>
-              <a:rPr lang="en-GB" i="1" dirty="0"/>
-              <a:t>Of children under the age of 15 who are diagnosed with AML, what percent</a:t>
-            </a:r>
-          </a:p>
-          <a:p>
-            <a:r>
-              <a:rPr lang="en-GB" i="1" dirty="0"/>
-              <a:t>survive for at least 5 years?</a:t>
+              <a:rPr lang="en-GB" dirty="0"/>
+              <a:t>The Department of Peace and Conflict Research estimates that 45.8 thousand people were</a:t>
+            </a:r>
+          </a:p>
+          <a:p>
+            <a:r>
+              <a:rPr lang="en-GB" dirty="0"/>
+              <a:t>killed per year in battles in the fifteen years from 1989-2003.</a:t>
+            </a:r>
+          </a:p>
+          <a:p>
+            <a:r>
+              <a:rPr lang="en-GB" dirty="0"/>
+              <a:t>How many thousands of people were killed per year in battles in the fifteen years from</a:t>
+            </a:r>
+          </a:p>
+          <a:p>
+            <a:r>
+              <a:rPr lang="en-GB" dirty="0"/>
+              <a:t>2004-2018?</a:t>
             </a:r>
           </a:p>
           <a:p>
@@ -4714,8 +5220,8 @@
         </p:nvSpPr>
         <p:spPr>
           <a:xfrm>
-            <a:off x="1704622" y="2460978"/>
-            <a:ext cx="5681555" cy="369332"/>
+            <a:off x="314129" y="4205484"/>
+            <a:ext cx="5609741" cy="369332"/>
           </a:xfrm>
           <a:prstGeom prst="rect">
             <a:avLst/>
@@ -4730,7 +5236,7 @@
           <a:p>
             <a:r>
               <a:rPr lang="en-DE" dirty="0"/>
-              <a:t>Good News – Actually the value is higher as you thought</a:t>
+              <a:t>Good News – Actually the value is lower as you thought</a:t>
             </a:r>
           </a:p>
         </p:txBody>
@@ -4749,8 +5255,8 @@
         </p:nvSpPr>
         <p:spPr>
           <a:xfrm>
-            <a:off x="5125156" y="3843025"/>
-            <a:ext cx="5455853" cy="369332"/>
+            <a:off x="6273823" y="2098179"/>
+            <a:ext cx="5527667" cy="369332"/>
           </a:xfrm>
           <a:prstGeom prst="rect">
             <a:avLst/>
@@ -4765,7 +5271,7 @@
           <a:p>
             <a:r>
               <a:rPr lang="en-DE" dirty="0"/>
-              <a:t>Bad News – Actually the value is lower as you thought</a:t>
+              <a:t>Bad News – Actually the value is higher as you thought</a:t>
             </a:r>
           </a:p>
         </p:txBody>
@@ -4784,7 +5290,7 @@
         </p:nvSpPr>
         <p:spPr>
           <a:xfrm>
-            <a:off x="4878934" y="3206003"/>
+            <a:off x="5849778" y="3244334"/>
             <a:ext cx="492443" cy="369332"/>
           </a:xfrm>
           <a:prstGeom prst="rect">
@@ -4884,7 +5390,7 @@
         <p:spPr>
           <a:xfrm>
             <a:off x="1749777" y="3059668"/>
-            <a:ext cx="5817683" cy="369332"/>
+            <a:ext cx="6494791" cy="369332"/>
           </a:xfrm>
           <a:prstGeom prst="rect">
             <a:avLst/>
@@ -4899,7 +5405,7 @@
           <a:p>
             <a:r>
               <a:rPr lang="en-DE" dirty="0"/>
-              <a:t>How likely is it that the message came from a true news ?</a:t>
+              <a:t>How likely is it that the message came from a true news source ?</a:t>
             </a:r>
           </a:p>
         </p:txBody>
@@ -5285,7 +5791,7 @@
         <p:cNvPr id="1" name="">
           <a:extLst>
             <a:ext uri="{FF2B5EF4-FFF2-40B4-BE49-F238E27FC236}">
-              <a16:creationId xmlns:a16="http://schemas.microsoft.com/office/drawing/2014/main" id="{20DAAC0D-56F0-AA04-0C76-90BD1127ACE0}"/>
+              <a16:creationId xmlns:a16="http://schemas.microsoft.com/office/drawing/2014/main" id="{93D4C2EF-77C5-A39B-0FA4-BCC6E9063B17}"/>
             </a:ext>
           </a:extLst>
         </p:cNvPr>
@@ -5305,7 +5811,7 @@
           <p:cNvPr id="2" name="Title 1">
             <a:extLst>
               <a:ext uri="{FF2B5EF4-FFF2-40B4-BE49-F238E27FC236}">
-                <a16:creationId xmlns:a16="http://schemas.microsoft.com/office/drawing/2014/main" id="{16D300CC-34E6-3D60-452F-2E3DAAA239DC}"/>
+                <a16:creationId xmlns:a16="http://schemas.microsoft.com/office/drawing/2014/main" id="{52E42F8A-C4A9-C9CD-855F-4B36D2038E62}"/>
               </a:ext>
             </a:extLst>
           </p:cNvPr>
@@ -5323,55 +5829,606 @@
           <a:p>
             <a:r>
               <a:rPr lang="en-DE" dirty="0"/>
-              <a:t>Repitition Results Regression</a:t>
-            </a:r>
-          </a:p>
-        </p:txBody>
-      </p:sp>
-      <p:sp>
-        <p:nvSpPr>
-          <p:cNvPr id="4" name="Content Placeholder 3">
+              <a:t>Regression Specifications</a:t>
+            </a:r>
+          </a:p>
+        </p:txBody>
+      </p:sp>
+      <mc:AlternateContent xmlns:mc="http://schemas.openxmlformats.org/markup-compatibility/2006">
+        <mc:Choice xmlns:a14="http://schemas.microsoft.com/office/drawing/2010/main" Requires="a14">
+          <p:sp>
+            <p:nvSpPr>
+              <p:cNvPr id="8" name="TextBox 7">
+                <a:extLst>
+                  <a:ext uri="{FF2B5EF4-FFF2-40B4-BE49-F238E27FC236}">
+                    <a16:creationId xmlns:a16="http://schemas.microsoft.com/office/drawing/2014/main" id="{ED5C3026-FAD4-C1BA-8AC6-1698827C2EEC}"/>
+                  </a:ext>
+                </a:extLst>
+              </p:cNvPr>
+              <p:cNvSpPr txBox="1"/>
+              <p:nvPr/>
+            </p:nvSpPr>
+            <p:spPr>
+              <a:xfrm>
+                <a:off x="694931" y="3188132"/>
+                <a:ext cx="10802137" cy="481735"/>
+              </a:xfrm>
+              <a:prstGeom prst="rect">
+                <a:avLst/>
+              </a:prstGeom>
+              <a:noFill/>
+            </p:spPr>
+            <p:txBody>
+              <a:bodyPr wrap="square" lIns="0" tIns="0" rIns="0" bIns="0" rtlCol="0">
+                <a:spAutoFit/>
+              </a:bodyPr>
+              <a:lstStyle/>
+              <a:p>
+                <a14:m>
+                  <m:oMathPara xmlns:m="http://schemas.openxmlformats.org/officeDocument/2006/math">
+                    <m:oMathParaPr>
+                      <m:jc m:val="centerGroup"/>
+                    </m:oMathParaPr>
+                    <m:oMath xmlns:m="http://schemas.openxmlformats.org/officeDocument/2006/math">
+                      <m:sSub>
+                        <m:sSubPr>
+                          <m:ctrlPr>
+                            <a:rPr lang="en-DE" sz="2800" i="1" smtClean="0">
+                              <a:latin typeface="Cambria Math" panose="02040503050406030204" pitchFamily="18" charset="0"/>
+                            </a:rPr>
+                          </m:ctrlPr>
+                        </m:sSubPr>
+                        <m:e>
+                          <m:r>
+                            <a:rPr lang="en-DE" sz="2800" i="1">
+                              <a:latin typeface="Cambria Math" panose="02040503050406030204" pitchFamily="18" charset="0"/>
+                              <a:ea typeface="Cambria Math" panose="02040503050406030204" pitchFamily="18" charset="0"/>
+                            </a:rPr>
+                            <m:t>𝛼</m:t>
+                          </m:r>
+                        </m:e>
+                        <m:sub>
+                          <m:r>
+                            <a:rPr lang="en-US" sz="2800" b="0" i="1" smtClean="0">
+                              <a:latin typeface="Cambria Math" panose="02040503050406030204" pitchFamily="18" charset="0"/>
+                            </a:rPr>
+                            <m:t>𝑖𝑞𝑟</m:t>
+                          </m:r>
+                        </m:sub>
+                      </m:sSub>
+                      <m:r>
+                        <a:rPr lang="en-US" sz="2800" b="0" i="1" smtClean="0">
+                          <a:latin typeface="Cambria Math" panose="02040503050406030204" pitchFamily="18" charset="0"/>
+                        </a:rPr>
+                        <m:t>=</m:t>
+                      </m:r>
+                      <m:r>
+                        <a:rPr lang="en-DE" sz="2800" i="1">
+                          <a:latin typeface="Cambria Math" panose="02040503050406030204" pitchFamily="18" charset="0"/>
+                          <a:ea typeface="Cambria Math" panose="02040503050406030204" pitchFamily="18" charset="0"/>
+                        </a:rPr>
+                        <m:t>𝛼</m:t>
+                      </m:r>
+                      <m:r>
+                        <a:rPr lang="en-US" sz="2800" b="0" i="1" smtClean="0">
+                          <a:latin typeface="Cambria Math" panose="02040503050406030204" pitchFamily="18" charset="0"/>
+                          <a:ea typeface="Cambria Math" panose="02040503050406030204" pitchFamily="18" charset="0"/>
+                        </a:rPr>
+                        <m:t>+</m:t>
+                      </m:r>
+                      <m:r>
+                        <a:rPr lang="en-US" sz="2800" b="0" i="1" smtClean="0">
+                          <a:latin typeface="Cambria Math" panose="02040503050406030204" pitchFamily="18" charset="0"/>
+                          <a:ea typeface="Cambria Math" panose="02040503050406030204" pitchFamily="18" charset="0"/>
+                        </a:rPr>
+                        <m:t>𝛽</m:t>
+                      </m:r>
+                      <m:r>
+                        <a:rPr lang="en-US" sz="2800" b="0" i="1" smtClean="0">
+                          <a:latin typeface="Cambria Math" panose="02040503050406030204" pitchFamily="18" charset="0"/>
+                          <a:ea typeface="Cambria Math" panose="02040503050406030204" pitchFamily="18" charset="0"/>
+                        </a:rPr>
+                        <m:t>∙</m:t>
+                      </m:r>
+                      <m:sSub>
+                        <m:sSubPr>
+                          <m:ctrlPr>
+                            <a:rPr lang="en-US" sz="2800" b="0" i="1" smtClean="0">
+                              <a:latin typeface="Cambria Math" panose="02040503050406030204" pitchFamily="18" charset="0"/>
+                              <a:ea typeface="Cambria Math" panose="02040503050406030204" pitchFamily="18" charset="0"/>
+                            </a:rPr>
+                          </m:ctrlPr>
+                        </m:sSubPr>
+                        <m:e>
+                          <m:r>
+                            <a:rPr lang="en-US" sz="2800" i="1">
+                              <a:latin typeface="Cambria Math" panose="02040503050406030204" pitchFamily="18" charset="0"/>
+                              <a:ea typeface="Cambria Math" panose="02040503050406030204" pitchFamily="18" charset="0"/>
+                            </a:rPr>
+                            <m:t>1</m:t>
+                          </m:r>
+                          <m:d>
+                            <m:dPr>
+                              <m:ctrlPr>
+                                <a:rPr lang="en-US" sz="2800" i="1">
+                                  <a:latin typeface="Cambria Math" panose="02040503050406030204" pitchFamily="18" charset="0"/>
+                                  <a:ea typeface="Cambria Math" panose="02040503050406030204" pitchFamily="18" charset="0"/>
+                                </a:rPr>
+                              </m:ctrlPr>
+                            </m:dPr>
+                            <m:e>
+                              <m:r>
+                                <a:rPr lang="en-US" sz="2800" i="1">
+                                  <a:latin typeface="Cambria Math" panose="02040503050406030204" pitchFamily="18" charset="0"/>
+                                  <a:ea typeface="Cambria Math" panose="02040503050406030204" pitchFamily="18" charset="0"/>
+                                </a:rPr>
+                                <m:t>𝐺𝑜𝑜𝑑</m:t>
+                              </m:r>
+                              <m:r>
+                                <a:rPr lang="en-US" sz="2800" i="1">
+                                  <a:latin typeface="Cambria Math" panose="02040503050406030204" pitchFamily="18" charset="0"/>
+                                  <a:ea typeface="Cambria Math" panose="02040503050406030204" pitchFamily="18" charset="0"/>
+                                </a:rPr>
+                                <m:t> </m:t>
+                              </m:r>
+                              <m:r>
+                                <a:rPr lang="en-US" sz="2800" i="1">
+                                  <a:latin typeface="Cambria Math" panose="02040503050406030204" pitchFamily="18" charset="0"/>
+                                  <a:ea typeface="Cambria Math" panose="02040503050406030204" pitchFamily="18" charset="0"/>
+                                </a:rPr>
+                                <m:t>𝑁𝑒𝑤𝑠</m:t>
+                              </m:r>
+                            </m:e>
+                          </m:d>
+                        </m:e>
+                        <m:sub>
+                          <m:r>
+                            <a:rPr lang="en-US" sz="2800" b="0" i="1" smtClean="0">
+                              <a:latin typeface="Cambria Math" panose="02040503050406030204" pitchFamily="18" charset="0"/>
+                              <a:ea typeface="Cambria Math" panose="02040503050406030204" pitchFamily="18" charset="0"/>
+                            </a:rPr>
+                            <m:t>𝑖𝑞𝑟</m:t>
+                          </m:r>
+                        </m:sub>
+                      </m:sSub>
+                      <m:r>
+                        <a:rPr lang="en-US" sz="2800" b="0" i="1" smtClean="0">
+                          <a:latin typeface="Cambria Math" panose="02040503050406030204" pitchFamily="18" charset="0"/>
+                          <a:ea typeface="Cambria Math" panose="02040503050406030204" pitchFamily="18" charset="0"/>
+                        </a:rPr>
+                        <m:t>+</m:t>
+                      </m:r>
+                      <m:sSup>
+                        <m:sSupPr>
+                          <m:ctrlPr>
+                            <a:rPr lang="en-US" sz="2800" b="0" i="1" smtClean="0">
+                              <a:latin typeface="Cambria Math" panose="02040503050406030204" pitchFamily="18" charset="0"/>
+                              <a:ea typeface="Cambria Math" panose="02040503050406030204" pitchFamily="18" charset="0"/>
+                            </a:rPr>
+                          </m:ctrlPr>
+                        </m:sSupPr>
+                        <m:e>
+                          <m:r>
+                            <a:rPr lang="en-US" sz="2800" i="1">
+                              <a:latin typeface="Cambria Math" panose="02040503050406030204" pitchFamily="18" charset="0"/>
+                              <a:ea typeface="Cambria Math" panose="02040503050406030204" pitchFamily="18" charset="0"/>
+                            </a:rPr>
+                            <m:t>𝛾</m:t>
+                          </m:r>
+                        </m:e>
+                        <m:sup>
+                          <m:r>
+                            <a:rPr lang="en-US" sz="2800" b="0" i="1" smtClean="0">
+                              <a:latin typeface="Cambria Math" panose="02040503050406030204" pitchFamily="18" charset="0"/>
+                              <a:ea typeface="Cambria Math" panose="02040503050406030204" pitchFamily="18" charset="0"/>
+                            </a:rPr>
+                            <m:t>𝑐𝑜𝑛𝑡𝑟𝑜𝑙𝑠</m:t>
+                          </m:r>
+                        </m:sup>
+                      </m:sSup>
+                      <m:sSub>
+                        <m:sSubPr>
+                          <m:ctrlPr>
+                            <a:rPr lang="en-US" sz="2800" b="0" i="1" smtClean="0">
+                              <a:latin typeface="Cambria Math" panose="02040503050406030204" pitchFamily="18" charset="0"/>
+                              <a:ea typeface="Cambria Math" panose="02040503050406030204" pitchFamily="18" charset="0"/>
+                            </a:rPr>
+                          </m:ctrlPr>
+                        </m:sSubPr>
+                        <m:e>
+                          <m:r>
+                            <a:rPr lang="en-US" sz="2800" i="1">
+                              <a:latin typeface="Cambria Math" panose="02040503050406030204" pitchFamily="18" charset="0"/>
+                              <a:ea typeface="Cambria Math" panose="02040503050406030204" pitchFamily="18" charset="0"/>
+                            </a:rPr>
+                            <m:t>𝑧</m:t>
+                          </m:r>
+                        </m:e>
+                        <m:sub>
+                          <m:r>
+                            <a:rPr lang="en-US" sz="2800" b="0" i="1" smtClean="0">
+                              <a:latin typeface="Cambria Math" panose="02040503050406030204" pitchFamily="18" charset="0"/>
+                              <a:ea typeface="Cambria Math" panose="02040503050406030204" pitchFamily="18" charset="0"/>
+                            </a:rPr>
+                            <m:t>𝑖</m:t>
+                          </m:r>
+                        </m:sub>
+                      </m:sSub>
+                      <m:r>
+                        <a:rPr lang="en-US" sz="2800" b="0" i="1" smtClean="0">
+                          <a:latin typeface="Cambria Math" panose="02040503050406030204" pitchFamily="18" charset="0"/>
+                          <a:ea typeface="Cambria Math" panose="02040503050406030204" pitchFamily="18" charset="0"/>
+                        </a:rPr>
+                        <m:t>+</m:t>
+                      </m:r>
+                      <m:r>
+                        <a:rPr lang="en-US" sz="2800" b="0" i="1" smtClean="0">
+                          <a:latin typeface="Cambria Math" panose="02040503050406030204" pitchFamily="18" charset="0"/>
+                          <a:ea typeface="Cambria Math" panose="02040503050406030204" pitchFamily="18" charset="0"/>
+                        </a:rPr>
+                        <m:t>𝛿</m:t>
+                      </m:r>
+                      <m:r>
+                        <a:rPr lang="en-US" sz="2800" b="0" i="1" smtClean="0">
+                          <a:latin typeface="Cambria Math" panose="02040503050406030204" pitchFamily="18" charset="0"/>
+                          <a:ea typeface="Cambria Math" panose="02040503050406030204" pitchFamily="18" charset="0"/>
+                        </a:rPr>
+                        <m:t>𝐹</m:t>
+                      </m:r>
+                      <m:sSub>
+                        <m:sSubPr>
+                          <m:ctrlPr>
+                            <a:rPr lang="en-US" sz="2800" b="0" i="1" smtClean="0">
+                              <a:latin typeface="Cambria Math" panose="02040503050406030204" pitchFamily="18" charset="0"/>
+                              <a:ea typeface="Cambria Math" panose="02040503050406030204" pitchFamily="18" charset="0"/>
+                            </a:rPr>
+                          </m:ctrlPr>
+                        </m:sSubPr>
+                        <m:e>
+                          <m:r>
+                            <a:rPr lang="en-US" sz="2800" b="0" i="1" smtClean="0">
+                              <a:latin typeface="Cambria Math" panose="02040503050406030204" pitchFamily="18" charset="0"/>
+                              <a:ea typeface="Cambria Math" panose="02040503050406030204" pitchFamily="18" charset="0"/>
+                            </a:rPr>
+                            <m:t>𝐸</m:t>
+                          </m:r>
+                        </m:e>
+                        <m:sub>
+                          <m:r>
+                            <a:rPr lang="en-US" sz="2800" b="0" i="1" smtClean="0">
+                              <a:latin typeface="Cambria Math" panose="02040503050406030204" pitchFamily="18" charset="0"/>
+                              <a:ea typeface="Cambria Math" panose="02040503050406030204" pitchFamily="18" charset="0"/>
+                            </a:rPr>
+                            <m:t>𝑟</m:t>
+                          </m:r>
+                        </m:sub>
+                      </m:sSub>
+                      <m:r>
+                        <a:rPr lang="en-US" sz="2800" b="0" i="1" smtClean="0">
+                          <a:latin typeface="Cambria Math" panose="02040503050406030204" pitchFamily="18" charset="0"/>
+                          <a:ea typeface="Cambria Math" panose="02040503050406030204" pitchFamily="18" charset="0"/>
+                        </a:rPr>
+                        <m:t>+</m:t>
+                      </m:r>
+                      <m:r>
+                        <a:rPr lang="en-US" sz="2800" b="0" i="1" smtClean="0">
+                          <a:latin typeface="Cambria Math" panose="02040503050406030204" pitchFamily="18" charset="0"/>
+                          <a:ea typeface="Cambria Math" panose="02040503050406030204" pitchFamily="18" charset="0"/>
+                        </a:rPr>
+                        <m:t>𝜁</m:t>
+                      </m:r>
+                      <m:r>
+                        <a:rPr lang="en-US" sz="2800" b="0" i="1" smtClean="0">
+                          <a:latin typeface="Cambria Math" panose="02040503050406030204" pitchFamily="18" charset="0"/>
+                          <a:ea typeface="Cambria Math" panose="02040503050406030204" pitchFamily="18" charset="0"/>
+                        </a:rPr>
+                        <m:t>𝐹</m:t>
+                      </m:r>
+                      <m:sSub>
+                        <m:sSubPr>
+                          <m:ctrlPr>
+                            <a:rPr lang="en-US" sz="2800" b="0" i="1" smtClean="0">
+                              <a:latin typeface="Cambria Math" panose="02040503050406030204" pitchFamily="18" charset="0"/>
+                              <a:ea typeface="Cambria Math" panose="02040503050406030204" pitchFamily="18" charset="0"/>
+                            </a:rPr>
+                          </m:ctrlPr>
+                        </m:sSubPr>
+                        <m:e>
+                          <m:r>
+                            <a:rPr lang="en-US" sz="2800" b="0" i="1" smtClean="0">
+                              <a:latin typeface="Cambria Math" panose="02040503050406030204" pitchFamily="18" charset="0"/>
+                              <a:ea typeface="Cambria Math" panose="02040503050406030204" pitchFamily="18" charset="0"/>
+                            </a:rPr>
+                            <m:t>𝐸</m:t>
+                          </m:r>
+                        </m:e>
+                        <m:sub>
+                          <m:r>
+                            <a:rPr lang="en-US" sz="2800" b="0" i="1" smtClean="0">
+                              <a:latin typeface="Cambria Math" panose="02040503050406030204" pitchFamily="18" charset="0"/>
+                              <a:ea typeface="Cambria Math" panose="02040503050406030204" pitchFamily="18" charset="0"/>
+                            </a:rPr>
+                            <m:t>𝑟</m:t>
+                          </m:r>
+                        </m:sub>
+                      </m:sSub>
+                      <m:r>
+                        <a:rPr lang="en-US" sz="2800" b="0" i="1" smtClean="0">
+                          <a:latin typeface="Cambria Math" panose="02040503050406030204" pitchFamily="18" charset="0"/>
+                          <a:ea typeface="Cambria Math" panose="02040503050406030204" pitchFamily="18" charset="0"/>
+                        </a:rPr>
+                        <m:t>+</m:t>
+                      </m:r>
+                      <m:sSub>
+                        <m:sSubPr>
+                          <m:ctrlPr>
+                            <a:rPr lang="en-US" sz="2800" b="0" i="1" smtClean="0">
+                              <a:latin typeface="Cambria Math" panose="02040503050406030204" pitchFamily="18" charset="0"/>
+                              <a:ea typeface="Cambria Math" panose="02040503050406030204" pitchFamily="18" charset="0"/>
+                            </a:rPr>
+                          </m:ctrlPr>
+                        </m:sSubPr>
+                        <m:e>
+                          <m:r>
+                            <a:rPr lang="en-US" sz="2800" i="1">
+                              <a:latin typeface="Cambria Math" panose="02040503050406030204" pitchFamily="18" charset="0"/>
+                              <a:ea typeface="Cambria Math" panose="02040503050406030204" pitchFamily="18" charset="0"/>
+                            </a:rPr>
+                            <m:t>𝜖</m:t>
+                          </m:r>
+                        </m:e>
+                        <m:sub>
+                          <m:r>
+                            <a:rPr lang="en-US" sz="2800" b="0" i="1" smtClean="0">
+                              <a:latin typeface="Cambria Math" panose="02040503050406030204" pitchFamily="18" charset="0"/>
+                              <a:ea typeface="Cambria Math" panose="02040503050406030204" pitchFamily="18" charset="0"/>
+                            </a:rPr>
+                            <m:t>𝑖𝑞𝑟</m:t>
+                          </m:r>
+                        </m:sub>
+                      </m:sSub>
+                    </m:oMath>
+                  </m:oMathPara>
+                </a14:m>
+                <a:endParaRPr lang="en-DE" sz="2800" dirty="0"/>
+              </a:p>
+            </p:txBody>
+          </p:sp>
+        </mc:Choice>
+        <mc:Fallback>
+          <p:sp>
+            <p:nvSpPr>
+              <p:cNvPr id="8" name="TextBox 7">
+                <a:extLst>
+                  <a:ext uri="{FF2B5EF4-FFF2-40B4-BE49-F238E27FC236}">
+                    <a16:creationId xmlns:a16="http://schemas.microsoft.com/office/drawing/2014/main" id="{ED5C3026-FAD4-C1BA-8AC6-1698827C2EEC}"/>
+                  </a:ext>
+                </a:extLst>
+              </p:cNvPr>
+              <p:cNvSpPr txBox="1">
+                <a:spLocks noRot="1" noChangeAspect="1" noMove="1" noResize="1" noEditPoints="1" noAdjustHandles="1" noChangeArrowheads="1" noChangeShapeType="1" noTextEdit="1"/>
+              </p:cNvSpPr>
+              <p:nvPr/>
+            </p:nvSpPr>
+            <p:spPr>
+              <a:xfrm>
+                <a:off x="694931" y="3188132"/>
+                <a:ext cx="10802137" cy="481735"/>
+              </a:xfrm>
+              <a:prstGeom prst="rect">
+                <a:avLst/>
+              </a:prstGeom>
+              <a:blipFill>
+                <a:blip r:embed="rId3"/>
+                <a:stretch>
+                  <a:fillRect t="-2632" b="-28947"/>
+                </a:stretch>
+              </a:blipFill>
+            </p:spPr>
+            <p:txBody>
+              <a:bodyPr/>
+              <a:lstStyle/>
+              <a:p>
+                <a:r>
+                  <a:rPr lang="en-DE">
+                    <a:noFill/>
+                  </a:rPr>
+                  <a:t> </a:t>
+                </a:r>
+              </a:p>
+            </p:txBody>
+          </p:sp>
+        </mc:Fallback>
+      </mc:AlternateContent>
+      <mc:AlternateContent xmlns:mc="http://schemas.openxmlformats.org/markup-compatibility/2006">
+        <mc:Choice xmlns:a14="http://schemas.microsoft.com/office/drawing/2010/main" Requires="a14">
+          <p:sp>
+            <p:nvSpPr>
+              <p:cNvPr id="9" name="TextBox 8">
+                <a:extLst>
+                  <a:ext uri="{FF2B5EF4-FFF2-40B4-BE49-F238E27FC236}">
+                    <a16:creationId xmlns:a16="http://schemas.microsoft.com/office/drawing/2014/main" id="{845AB321-CCC9-72F5-B2F1-9B5814AC5216}"/>
+                  </a:ext>
+                </a:extLst>
+              </p:cNvPr>
+              <p:cNvSpPr txBox="1"/>
+              <p:nvPr/>
+            </p:nvSpPr>
+            <p:spPr>
+              <a:xfrm>
+                <a:off x="170033" y="6419692"/>
+                <a:ext cx="4520340" cy="276999"/>
+              </a:xfrm>
+              <a:prstGeom prst="rect">
+                <a:avLst/>
+              </a:prstGeom>
+              <a:noFill/>
+            </p:spPr>
+            <p:txBody>
+              <a:bodyPr wrap="none" lIns="0" tIns="0" rIns="0" bIns="0" rtlCol="0">
+                <a:spAutoFit/>
+              </a:bodyPr>
+              <a:lstStyle/>
+              <a:p>
+                <a14:m>
+                  <m:oMathPara xmlns:m="http://schemas.openxmlformats.org/officeDocument/2006/math">
+                    <m:oMathParaPr>
+                      <m:jc m:val="centerGroup"/>
+                    </m:oMathParaPr>
+                    <m:oMath xmlns:m="http://schemas.openxmlformats.org/officeDocument/2006/math">
+                      <m:r>
+                        <a:rPr lang="en-US" b="0" i="1" smtClean="0">
+                          <a:latin typeface="Cambria Math" panose="02040503050406030204" pitchFamily="18" charset="0"/>
+                        </a:rPr>
+                        <m:t>𝑐𝑜𝑛𝑡𝑟𝑜𝑙𝑠</m:t>
+                      </m:r>
+                      <m:r>
+                        <a:rPr lang="en-US" b="0" i="1" smtClean="0">
+                          <a:latin typeface="Cambria Math" panose="02040503050406030204" pitchFamily="18" charset="0"/>
+                        </a:rPr>
+                        <m:t>=</m:t>
+                      </m:r>
+                      <m:r>
+                        <a:rPr lang="en-US" b="0" i="1" smtClean="0">
+                          <a:latin typeface="Cambria Math" panose="02040503050406030204" pitchFamily="18" charset="0"/>
+                        </a:rPr>
+                        <m:t>𝑎𝑔𝑒</m:t>
+                      </m:r>
+                      <m:r>
+                        <a:rPr lang="en-US" b="0" i="1" smtClean="0">
+                          <a:latin typeface="Cambria Math" panose="02040503050406030204" pitchFamily="18" charset="0"/>
+                        </a:rPr>
+                        <m:t>,</m:t>
+                      </m:r>
+                      <m:r>
+                        <a:rPr lang="en-US" b="0" i="1" smtClean="0">
+                          <a:latin typeface="Cambria Math" panose="02040503050406030204" pitchFamily="18" charset="0"/>
+                        </a:rPr>
+                        <m:t>𝑔𝑒𝑛𝑑𝑒𝑟</m:t>
+                      </m:r>
+                      <m:r>
+                        <a:rPr lang="en-US" b="0" i="1" smtClean="0">
+                          <a:latin typeface="Cambria Math" panose="02040503050406030204" pitchFamily="18" charset="0"/>
+                        </a:rPr>
+                        <m:t>,</m:t>
+                      </m:r>
+                      <m:r>
+                        <a:rPr lang="en-US" b="0" i="1" smtClean="0">
+                          <a:latin typeface="Cambria Math" panose="02040503050406030204" pitchFamily="18" charset="0"/>
+                        </a:rPr>
+                        <m:t>𝑦𝑒𝑎𝑟𝑠</m:t>
+                      </m:r>
+                      <m:r>
+                        <a:rPr lang="en-US" b="0" i="1" smtClean="0">
+                          <a:latin typeface="Cambria Math" panose="02040503050406030204" pitchFamily="18" charset="0"/>
+                        </a:rPr>
+                        <m:t> </m:t>
+                      </m:r>
+                      <m:r>
+                        <a:rPr lang="en-US" b="0" i="1" smtClean="0">
+                          <a:latin typeface="Cambria Math" panose="02040503050406030204" pitchFamily="18" charset="0"/>
+                        </a:rPr>
+                        <m:t>𝑜𝑓</m:t>
+                      </m:r>
+                      <m:r>
+                        <a:rPr lang="en-US" b="0" i="1" smtClean="0">
+                          <a:latin typeface="Cambria Math" panose="02040503050406030204" pitchFamily="18" charset="0"/>
+                        </a:rPr>
+                        <m:t> </m:t>
+                      </m:r>
+                      <m:r>
+                        <a:rPr lang="en-US" b="0" i="1" smtClean="0">
+                          <a:latin typeface="Cambria Math" panose="02040503050406030204" pitchFamily="18" charset="0"/>
+                        </a:rPr>
+                        <m:t>𝑒𝑑𝑢𝑐𝑎𝑡𝑖𝑜𝑛</m:t>
+                      </m:r>
+                    </m:oMath>
+                  </m:oMathPara>
+                </a14:m>
+                <a:endParaRPr lang="en-DE" dirty="0"/>
+              </a:p>
+            </p:txBody>
+          </p:sp>
+        </mc:Choice>
+        <mc:Fallback>
+          <p:sp>
+            <p:nvSpPr>
+              <p:cNvPr id="9" name="TextBox 8">
+                <a:extLst>
+                  <a:ext uri="{FF2B5EF4-FFF2-40B4-BE49-F238E27FC236}">
+                    <a16:creationId xmlns:a16="http://schemas.microsoft.com/office/drawing/2014/main" id="{845AB321-CCC9-72F5-B2F1-9B5814AC5216}"/>
+                  </a:ext>
+                </a:extLst>
+              </p:cNvPr>
+              <p:cNvSpPr txBox="1">
+                <a:spLocks noRot="1" noChangeAspect="1" noMove="1" noResize="1" noEditPoints="1" noAdjustHandles="1" noChangeArrowheads="1" noChangeShapeType="1" noTextEdit="1"/>
+              </p:cNvSpPr>
+              <p:nvPr/>
+            </p:nvSpPr>
+            <p:spPr>
+              <a:xfrm>
+                <a:off x="170033" y="6419692"/>
+                <a:ext cx="4520340" cy="276999"/>
+              </a:xfrm>
+              <a:prstGeom prst="rect">
+                <a:avLst/>
+              </a:prstGeom>
+              <a:blipFill>
+                <a:blip r:embed="rId4"/>
+                <a:stretch>
+                  <a:fillRect l="-840" t="-8696" r="-560" b="-34783"/>
+                </a:stretch>
+              </a:blipFill>
+            </p:spPr>
+            <p:txBody>
+              <a:bodyPr/>
+              <a:lstStyle/>
+              <a:p>
+                <a:r>
+                  <a:rPr lang="en-DE">
+                    <a:noFill/>
+                  </a:rPr>
+                  <a:t> </a:t>
+                </a:r>
+              </a:p>
+            </p:txBody>
+          </p:sp>
+        </mc:Fallback>
+      </mc:AlternateContent>
+      <p:pic>
+        <p:nvPicPr>
+          <p:cNvPr id="10" name="Picture 9">
             <a:extLst>
               <a:ext uri="{FF2B5EF4-FFF2-40B4-BE49-F238E27FC236}">
-                <a16:creationId xmlns:a16="http://schemas.microsoft.com/office/drawing/2014/main" id="{1E0EF6BD-B402-44FB-D57E-1BE3E5B7E431}"/>
+                <a16:creationId xmlns:a16="http://schemas.microsoft.com/office/drawing/2014/main" id="{F925DCFB-101D-B869-DBAF-CEA34B949AF2}"/>
               </a:ext>
             </a:extLst>
           </p:cNvPr>
-          <p:cNvSpPr>
-            <a:spLocks noGrp="1"/>
-          </p:cNvSpPr>
-          <p:nvPr>
-            <p:ph idx="1"/>
-          </p:nvPr>
-        </p:nvSpPr>
-        <p:spPr/>
-        <p:txBody>
-          <a:bodyPr/>
-          <a:lstStyle/>
-          <a:p>
-            <a:r>
-              <a:rPr lang="en-DE" dirty="0"/>
-              <a:t>We tried to replicate the results with the original data </a:t>
-            </a:r>
-          </a:p>
-          <a:p>
-            <a:r>
-              <a:rPr lang="en-DE" dirty="0"/>
-              <a:t>We only used wave 1, due to the complexity</a:t>
-            </a:r>
-          </a:p>
-          <a:p>
-            <a:r>
-              <a:rPr lang="en-DE" dirty="0"/>
-              <a:t>Out results show that…</a:t>
-            </a:r>
-          </a:p>
-        </p:txBody>
-      </p:sp>
+          <p:cNvPicPr>
+            <a:picLocks noChangeAspect="1"/>
+          </p:cNvPicPr>
+          <p:nvPr/>
+        </p:nvPicPr>
+        <p:blipFill>
+          <a:blip r:embed="rId5"/>
+          <a:stretch>
+            <a:fillRect/>
+          </a:stretch>
+        </p:blipFill>
+        <p:spPr>
+          <a:xfrm>
+            <a:off x="9433056" y="4151955"/>
+            <a:ext cx="2758944" cy="2758944"/>
+          </a:xfrm>
+          <a:prstGeom prst="rect">
+            <a:avLst/>
+          </a:prstGeom>
+        </p:spPr>
+      </p:pic>
     </p:spTree>
     <p:extLst>
       <p:ext uri="{BB962C8B-B14F-4D97-AF65-F5344CB8AC3E}">
-        <p14:creationId xmlns:p14="http://schemas.microsoft.com/office/powerpoint/2010/main" val="2752798552"/>
+        <p14:creationId xmlns:p14="http://schemas.microsoft.com/office/powerpoint/2010/main" val="44925590"/>
       </p:ext>
     </p:extLst>
   </p:cSld>
@@ -5389,7 +6446,7 @@
         <p:cNvPr id="1" name="">
           <a:extLst>
             <a:ext uri="{FF2B5EF4-FFF2-40B4-BE49-F238E27FC236}">
-              <a16:creationId xmlns:a16="http://schemas.microsoft.com/office/drawing/2014/main" id="{A933A6D6-2AD1-4298-61F8-7C7CB36CDEC5}"/>
+              <a16:creationId xmlns:a16="http://schemas.microsoft.com/office/drawing/2014/main" id="{2FED652F-BD4D-ED46-0E6D-6FA8DE96A9A2}"/>
             </a:ext>
           </a:extLst>
         </p:cNvPr>
@@ -5404,66 +6461,40 @@
           <a:chExt cx="0" cy="0"/>
         </a:xfrm>
       </p:grpSpPr>
-      <p:sp>
-        <p:nvSpPr>
-          <p:cNvPr id="2" name="Title 1">
+      <p:pic>
+        <p:nvPicPr>
+          <p:cNvPr id="5" name="Picture 4" descr="A graph on a black background&#10;&#10;AI-generated content may be incorrect.">
             <a:extLst>
               <a:ext uri="{FF2B5EF4-FFF2-40B4-BE49-F238E27FC236}">
-                <a16:creationId xmlns:a16="http://schemas.microsoft.com/office/drawing/2014/main" id="{C0BCFDF1-BD49-E4E1-D114-B8BB62B10EF9}"/>
+                <a16:creationId xmlns:a16="http://schemas.microsoft.com/office/drawing/2014/main" id="{B862901F-274B-49BA-0CA1-F4DEB9BCD693}"/>
               </a:ext>
             </a:extLst>
           </p:cNvPr>
-          <p:cNvSpPr>
-            <a:spLocks noGrp="1"/>
-          </p:cNvSpPr>
-          <p:nvPr>
-            <p:ph type="title"/>
-          </p:nvPr>
-        </p:nvSpPr>
-        <p:spPr/>
-        <p:txBody>
-          <a:bodyPr/>
-          <a:lstStyle/>
-          <a:p>
-            <a:r>
-              <a:rPr lang="en-DE" dirty="0"/>
-              <a:t>Extension Results</a:t>
-            </a:r>
-          </a:p>
-        </p:txBody>
-      </p:sp>
-      <p:sp>
-        <p:nvSpPr>
-          <p:cNvPr id="4" name="Content Placeholder 3">
-            <a:extLst>
-              <a:ext uri="{FF2B5EF4-FFF2-40B4-BE49-F238E27FC236}">
-                <a16:creationId xmlns:a16="http://schemas.microsoft.com/office/drawing/2014/main" id="{856C0218-8B0A-CB4E-3B56-F649F553E432}"/>
-              </a:ext>
-            </a:extLst>
-          </p:cNvPr>
-          <p:cNvSpPr>
-            <a:spLocks noGrp="1"/>
-          </p:cNvSpPr>
-          <p:nvPr>
-            <p:ph idx="1"/>
-          </p:nvPr>
-        </p:nvSpPr>
-        <p:spPr/>
-        <p:txBody>
-          <a:bodyPr/>
-          <a:lstStyle/>
-          <a:p>
-            <a:r>
-              <a:rPr lang="en-DE" dirty="0"/>
-              <a:t>After replication we tried to extend the experiment by…</a:t>
-            </a:r>
-          </a:p>
-        </p:txBody>
-      </p:sp>
+          <p:cNvPicPr>
+            <a:picLocks noChangeAspect="1"/>
+          </p:cNvPicPr>
+          <p:nvPr/>
+        </p:nvPicPr>
+        <p:blipFill>
+          <a:blip r:embed="rId3"/>
+          <a:stretch>
+            <a:fillRect/>
+          </a:stretch>
+        </p:blipFill>
+        <p:spPr>
+          <a:xfrm>
+            <a:off x="1676715" y="162733"/>
+            <a:ext cx="8838570" cy="6532534"/>
+          </a:xfrm>
+          <a:prstGeom prst="rect">
+            <a:avLst/>
+          </a:prstGeom>
+        </p:spPr>
+      </p:pic>
     </p:spTree>
     <p:extLst>
       <p:ext uri="{BB962C8B-B14F-4D97-AF65-F5344CB8AC3E}">
-        <p14:creationId xmlns:p14="http://schemas.microsoft.com/office/powerpoint/2010/main" val="2239823579"/>
+        <p14:creationId xmlns:p14="http://schemas.microsoft.com/office/powerpoint/2010/main" val="2841117719"/>
       </p:ext>
     </p:extLst>
   </p:cSld>
@@ -5481,7 +6512,7 @@
         <p:cNvPr id="1" name="">
           <a:extLst>
             <a:ext uri="{FF2B5EF4-FFF2-40B4-BE49-F238E27FC236}">
-              <a16:creationId xmlns:a16="http://schemas.microsoft.com/office/drawing/2014/main" id="{D9038F16-A74B-D157-7A79-31BC30588C8C}"/>
+              <a16:creationId xmlns:a16="http://schemas.microsoft.com/office/drawing/2014/main" id="{15B6B3E9-FAEB-19E9-B202-E5907696B169}"/>
             </a:ext>
           </a:extLst>
         </p:cNvPr>
@@ -5496,81 +6527,40 @@
           <a:chExt cx="0" cy="0"/>
         </a:xfrm>
       </p:grpSpPr>
-      <p:sp>
-        <p:nvSpPr>
-          <p:cNvPr id="2" name="Title 1">
+      <p:pic>
+        <p:nvPicPr>
+          <p:cNvPr id="3" name="Picture 2" descr="A screen shot of a graph&#10;&#10;AI-generated content may be incorrect.">
             <a:extLst>
               <a:ext uri="{FF2B5EF4-FFF2-40B4-BE49-F238E27FC236}">
-                <a16:creationId xmlns:a16="http://schemas.microsoft.com/office/drawing/2014/main" id="{54A786B3-B22A-C475-B8C6-4B02A5EBA9D3}"/>
+                <a16:creationId xmlns:a16="http://schemas.microsoft.com/office/drawing/2014/main" id="{D27ECE07-846D-1FE1-9530-E24CEA8FB3EC}"/>
               </a:ext>
             </a:extLst>
           </p:cNvPr>
-          <p:cNvSpPr>
-            <a:spLocks noGrp="1"/>
-          </p:cNvSpPr>
-          <p:nvPr>
-            <p:ph type="title"/>
-          </p:nvPr>
-        </p:nvSpPr>
-        <p:spPr/>
-        <p:txBody>
-          <a:bodyPr/>
-          <a:lstStyle/>
-          <a:p>
-            <a:r>
-              <a:rPr lang="en-DE" dirty="0"/>
-              <a:t>Verdict &amp; Hypothesis</a:t>
-            </a:r>
-          </a:p>
-        </p:txBody>
-      </p:sp>
-      <p:sp>
-        <p:nvSpPr>
-          <p:cNvPr id="4" name="Content Placeholder 3">
-            <a:extLst>
-              <a:ext uri="{FF2B5EF4-FFF2-40B4-BE49-F238E27FC236}">
-                <a16:creationId xmlns:a16="http://schemas.microsoft.com/office/drawing/2014/main" id="{ADCBA40C-CD97-B539-5821-26C7CFB800B5}"/>
-              </a:ext>
-            </a:extLst>
-          </p:cNvPr>
-          <p:cNvSpPr>
-            <a:spLocks noGrp="1"/>
-          </p:cNvSpPr>
-          <p:nvPr>
-            <p:ph idx="1"/>
-          </p:nvPr>
-        </p:nvSpPr>
-        <p:spPr/>
-        <p:txBody>
-          <a:bodyPr/>
-          <a:lstStyle/>
-          <a:p>
-            <a:r>
-              <a:rPr lang="en-DE" dirty="0"/>
-              <a:t>We see that people do not engage in motivated reasoning when receiving good news, they hold their beliefs  </a:t>
-            </a:r>
-          </a:p>
-          <a:p>
-            <a:pPr lvl="1"/>
-            <a:r>
-              <a:rPr lang="en-GB" dirty="0"/>
-              <a:t>Motivated reasoning does not arise from wanting the world to be good.</a:t>
-            </a:r>
-            <a:br>
-              <a:rPr lang="en-GB" dirty="0"/>
-            </a:br>
-            <a:r>
-              <a:rPr lang="en-GB" dirty="0"/>
-              <a:t>It arises when beliefs serve identity, ego, or strategic function.</a:t>
-            </a:r>
-            <a:endParaRPr lang="en-DE" dirty="0"/>
-          </a:p>
-        </p:txBody>
-      </p:sp>
+          <p:cNvPicPr>
+            <a:picLocks noChangeAspect="1"/>
+          </p:cNvPicPr>
+          <p:nvPr/>
+        </p:nvPicPr>
+        <p:blipFill>
+          <a:blip r:embed="rId3"/>
+          <a:stretch>
+            <a:fillRect/>
+          </a:stretch>
+        </p:blipFill>
+        <p:spPr>
+          <a:xfrm>
+            <a:off x="1970179" y="379631"/>
+            <a:ext cx="8251641" cy="6098738"/>
+          </a:xfrm>
+          <a:prstGeom prst="rect">
+            <a:avLst/>
+          </a:prstGeom>
+        </p:spPr>
+      </p:pic>
     </p:spTree>
     <p:extLst>
       <p:ext uri="{BB962C8B-B14F-4D97-AF65-F5344CB8AC3E}">
-        <p14:creationId xmlns:p14="http://schemas.microsoft.com/office/powerpoint/2010/main" val="330628484"/>
+        <p14:creationId xmlns:p14="http://schemas.microsoft.com/office/powerpoint/2010/main" val="942053188"/>
       </p:ext>
     </p:extLst>
   </p:cSld>

--- a/replication_presentation.pptx
+++ b/replication_presentation.pptx
@@ -15,10 +15,10 @@
     <p:sldId id="265" r:id="rId6"/>
     <p:sldId id="259" r:id="rId7"/>
     <p:sldId id="267" r:id="rId8"/>
-    <p:sldId id="268" r:id="rId9"/>
-    <p:sldId id="269" r:id="rId10"/>
-    <p:sldId id="266" r:id="rId11"/>
-    <p:sldId id="262" r:id="rId12"/>
+    <p:sldId id="270" r:id="rId9"/>
+    <p:sldId id="271" r:id="rId10"/>
+    <p:sldId id="272" r:id="rId11"/>
+    <p:sldId id="273" r:id="rId12"/>
   </p:sldIdLst>
   <p:sldSz cx="12192000" cy="6858000"/>
   <p:notesSz cx="6858000" cy="9144000"/>
@@ -567,7 +567,13 @@
   <p:cSld>
     <p:spTree>
       <p:nvGrpSpPr>
-        <p:cNvPr id="1" name=""/>
+        <p:cNvPr id="1" name="">
+          <a:extLst>
+            <a:ext uri="{FF2B5EF4-FFF2-40B4-BE49-F238E27FC236}">
+              <a16:creationId xmlns:a16="http://schemas.microsoft.com/office/drawing/2014/main" id="{67690356-426B-7DC6-25B7-A3EE8FBB6E1F}"/>
+            </a:ext>
+          </a:extLst>
+        </p:cNvPr>
         <p:cNvGrpSpPr/>
         <p:nvPr/>
       </p:nvGrpSpPr>
@@ -581,7 +587,13 @@
       </p:grpSpPr>
       <p:sp>
         <p:nvSpPr>
-          <p:cNvPr id="2" name="Slide Image Placeholder 1"/>
+          <p:cNvPr id="2" name="Slide Image Placeholder 1">
+            <a:extLst>
+              <a:ext uri="{FF2B5EF4-FFF2-40B4-BE49-F238E27FC236}">
+                <a16:creationId xmlns:a16="http://schemas.microsoft.com/office/drawing/2014/main" id="{07EF1ED2-4642-16E6-1E79-3261F4D3BA11}"/>
+              </a:ext>
+            </a:extLst>
+          </p:cNvPr>
           <p:cNvSpPr>
             <a:spLocks noGrp="1" noRot="1" noChangeAspect="1"/>
           </p:cNvSpPr>
@@ -593,7 +605,13 @@
       </p:sp>
       <p:sp>
         <p:nvSpPr>
-          <p:cNvPr id="3" name="Notes Placeholder 2"/>
+          <p:cNvPr id="3" name="Notes Placeholder 2">
+            <a:extLst>
+              <a:ext uri="{FF2B5EF4-FFF2-40B4-BE49-F238E27FC236}">
+                <a16:creationId xmlns:a16="http://schemas.microsoft.com/office/drawing/2014/main" id="{FC486C5B-333D-AD2D-30E6-2522CD8552F2}"/>
+              </a:ext>
+            </a:extLst>
+          </p:cNvPr>
           <p:cNvSpPr>
             <a:spLocks noGrp="1"/>
           </p:cNvSpPr>
@@ -606,13 +624,50 @@
           <a:bodyPr/>
           <a:lstStyle/>
           <a:p>
+            <a:r>
+              <a:rPr lang="en-GB" dirty="0"/>
+              <a:t>So quite a complicated setup to do what exactly ?</a:t>
+            </a:r>
+          </a:p>
+          <a:p>
+            <a:r>
+              <a:rPr lang="en-GB" dirty="0"/>
+              <a:t>The Goal was to test whether </a:t>
+            </a:r>
+            <a:r>
+              <a:rPr lang="en-GB" b="1" dirty="0"/>
+              <a:t>“good news” alone</a:t>
+            </a:r>
+            <a:r>
+              <a:rPr lang="en-GB" dirty="0"/>
+              <a:t> causes motivated reasoning, </a:t>
+            </a:r>
+            <a:r>
+              <a:rPr lang="en-GB" i="1" dirty="0"/>
+              <a:t>independent</a:t>
+            </a:r>
+            <a:r>
+              <a:rPr lang="en-GB" dirty="0"/>
+              <a:t> of: self-image, political identity, incentives and functional usefulness of beliefs</a:t>
+            </a:r>
+          </a:p>
+          <a:p>
             <a:endParaRPr lang="en-DE" dirty="0"/>
           </a:p>
-        </p:txBody>
-      </p:sp>
-      <p:sp>
-        <p:nvSpPr>
-          <p:cNvPr id="4" name="Slide Number Placeholder 3"/>
+          <a:p>
+            <a:endParaRPr lang="en-DE" dirty="0"/>
+          </a:p>
+        </p:txBody>
+      </p:sp>
+      <p:sp>
+        <p:nvSpPr>
+          <p:cNvPr id="4" name="Slide Number Placeholder 3">
+            <a:extLst>
+              <a:ext uri="{FF2B5EF4-FFF2-40B4-BE49-F238E27FC236}">
+                <a16:creationId xmlns:a16="http://schemas.microsoft.com/office/drawing/2014/main" id="{838A158E-1EC6-7E6A-61B5-2CA97E06C446}"/>
+              </a:ext>
+            </a:extLst>
+          </p:cNvPr>
           <p:cNvSpPr>
             <a:spLocks noGrp="1"/>
           </p:cNvSpPr>
@@ -636,7 +691,7 @@
     </p:spTree>
     <p:extLst>
       <p:ext uri="{BB962C8B-B14F-4D97-AF65-F5344CB8AC3E}">
-        <p14:creationId xmlns:p14="http://schemas.microsoft.com/office/powerpoint/2010/main" val="1251297992"/>
+        <p14:creationId xmlns:p14="http://schemas.microsoft.com/office/powerpoint/2010/main" val="3820537487"/>
       </p:ext>
     </p:extLst>
   </p:cSld>
@@ -720,7 +775,7 @@
     </p:spTree>
     <p:extLst>
       <p:ext uri="{BB962C8B-B14F-4D97-AF65-F5344CB8AC3E}">
-        <p14:creationId xmlns:p14="http://schemas.microsoft.com/office/powerpoint/2010/main" val="628477870"/>
+        <p14:creationId xmlns:p14="http://schemas.microsoft.com/office/powerpoint/2010/main" val="1675745439"/>
       </p:ext>
     </p:extLst>
   </p:cSld>
@@ -1529,7 +1584,7 @@
         <p:cNvPr id="1" name="">
           <a:extLst>
             <a:ext uri="{FF2B5EF4-FFF2-40B4-BE49-F238E27FC236}">
-              <a16:creationId xmlns:a16="http://schemas.microsoft.com/office/drawing/2014/main" id="{91F34819-81D9-B43A-AAEE-8228DE8951BC}"/>
+              <a16:creationId xmlns:a16="http://schemas.microsoft.com/office/drawing/2014/main" id="{FB4FC49B-506A-631C-181D-E6EB027A7146}"/>
             </a:ext>
           </a:extLst>
         </p:cNvPr>
@@ -1549,7 +1604,7 @@
           <p:cNvPr id="2" name="Slide Image Placeholder 1">
             <a:extLst>
               <a:ext uri="{FF2B5EF4-FFF2-40B4-BE49-F238E27FC236}">
-                <a16:creationId xmlns:a16="http://schemas.microsoft.com/office/drawing/2014/main" id="{FC396B3C-82C3-1441-D4DB-F9669E22CEF8}"/>
+                <a16:creationId xmlns:a16="http://schemas.microsoft.com/office/drawing/2014/main" id="{50CC318A-F3E8-6EB5-E520-BC92DD38682E}"/>
               </a:ext>
             </a:extLst>
           </p:cNvPr>
@@ -1567,7 +1622,7 @@
           <p:cNvPr id="3" name="Notes Placeholder 2">
             <a:extLst>
               <a:ext uri="{FF2B5EF4-FFF2-40B4-BE49-F238E27FC236}">
-                <a16:creationId xmlns:a16="http://schemas.microsoft.com/office/drawing/2014/main" id="{F833D996-8016-B438-57B3-C7352149B0E3}"/>
+                <a16:creationId xmlns:a16="http://schemas.microsoft.com/office/drawing/2014/main" id="{D5760C15-FBBD-9690-A7CE-05EE8041EACB}"/>
               </a:ext>
             </a:extLst>
           </p:cNvPr>
@@ -1583,6 +1638,37 @@
           <a:bodyPr/>
           <a:lstStyle/>
           <a:p>
+            <a:r>
+              <a:rPr lang="en-GB" dirty="0"/>
+              <a:t>So quite a complicated setup to do what exactly ?</a:t>
+            </a:r>
+          </a:p>
+          <a:p>
+            <a:r>
+              <a:rPr lang="en-GB" dirty="0"/>
+              <a:t>The Goal was to test whether </a:t>
+            </a:r>
+            <a:r>
+              <a:rPr lang="en-GB" b="1" dirty="0"/>
+              <a:t>“good news” alone</a:t>
+            </a:r>
+            <a:r>
+              <a:rPr lang="en-GB" dirty="0"/>
+              <a:t> causes motivated reasoning, </a:t>
+            </a:r>
+            <a:r>
+              <a:rPr lang="en-GB" i="1" dirty="0"/>
+              <a:t>independent</a:t>
+            </a:r>
+            <a:r>
+              <a:rPr lang="en-GB" dirty="0"/>
+              <a:t> of: self-image, political identity, incentives and functional usefulness of beliefs</a:t>
+            </a:r>
+          </a:p>
+          <a:p>
+            <a:endParaRPr lang="en-DE" dirty="0"/>
+          </a:p>
+          <a:p>
             <a:endParaRPr lang="en-DE" dirty="0"/>
           </a:p>
         </p:txBody>
@@ -1592,7 +1678,7 @@
           <p:cNvPr id="4" name="Slide Number Placeholder 3">
             <a:extLst>
               <a:ext uri="{FF2B5EF4-FFF2-40B4-BE49-F238E27FC236}">
-                <a16:creationId xmlns:a16="http://schemas.microsoft.com/office/drawing/2014/main" id="{CFE6523F-C24E-9C28-75DA-A3BA0E0A87E0}"/>
+                <a16:creationId xmlns:a16="http://schemas.microsoft.com/office/drawing/2014/main" id="{99849C6B-1D26-173A-4C4C-050353689107}"/>
               </a:ext>
             </a:extLst>
           </p:cNvPr>
@@ -1619,7 +1705,7 @@
     </p:spTree>
     <p:extLst>
       <p:ext uri="{BB962C8B-B14F-4D97-AF65-F5344CB8AC3E}">
-        <p14:creationId xmlns:p14="http://schemas.microsoft.com/office/powerpoint/2010/main" val="920723390"/>
+        <p14:creationId xmlns:p14="http://schemas.microsoft.com/office/powerpoint/2010/main" val="1613411870"/>
       </p:ext>
     </p:extLst>
   </p:cSld>
@@ -1637,7 +1723,7 @@
         <p:cNvPr id="1" name="">
           <a:extLst>
             <a:ext uri="{FF2B5EF4-FFF2-40B4-BE49-F238E27FC236}">
-              <a16:creationId xmlns:a16="http://schemas.microsoft.com/office/drawing/2014/main" id="{5F3B0637-9F6F-2260-26EC-022AA4C26956}"/>
+              <a16:creationId xmlns:a16="http://schemas.microsoft.com/office/drawing/2014/main" id="{08124C5D-6F5F-8E8C-D1F9-0CC541ABFFA5}"/>
             </a:ext>
           </a:extLst>
         </p:cNvPr>
@@ -1657,7 +1743,7 @@
           <p:cNvPr id="2" name="Slide Image Placeholder 1">
             <a:extLst>
               <a:ext uri="{FF2B5EF4-FFF2-40B4-BE49-F238E27FC236}">
-                <a16:creationId xmlns:a16="http://schemas.microsoft.com/office/drawing/2014/main" id="{B9045CA6-C959-69FB-A3EB-D5989341F6B7}"/>
+                <a16:creationId xmlns:a16="http://schemas.microsoft.com/office/drawing/2014/main" id="{0A951A14-891E-A062-27C2-EEC2CEC5095C}"/>
               </a:ext>
             </a:extLst>
           </p:cNvPr>
@@ -1675,7 +1761,7 @@
           <p:cNvPr id="3" name="Notes Placeholder 2">
             <a:extLst>
               <a:ext uri="{FF2B5EF4-FFF2-40B4-BE49-F238E27FC236}">
-                <a16:creationId xmlns:a16="http://schemas.microsoft.com/office/drawing/2014/main" id="{A60FE0E2-EDCB-C90B-4C1B-88085B3F9B6B}"/>
+                <a16:creationId xmlns:a16="http://schemas.microsoft.com/office/drawing/2014/main" id="{C379259A-318D-DD26-910E-8E0295B65422}"/>
               </a:ext>
             </a:extLst>
           </p:cNvPr>
@@ -1691,6 +1777,37 @@
           <a:bodyPr/>
           <a:lstStyle/>
           <a:p>
+            <a:r>
+              <a:rPr lang="en-GB" dirty="0"/>
+              <a:t>So quite a complicated setup to do what exactly ?</a:t>
+            </a:r>
+          </a:p>
+          <a:p>
+            <a:r>
+              <a:rPr lang="en-GB" dirty="0"/>
+              <a:t>The Goal was to test whether </a:t>
+            </a:r>
+            <a:r>
+              <a:rPr lang="en-GB" b="1" dirty="0"/>
+              <a:t>“good news” alone</a:t>
+            </a:r>
+            <a:r>
+              <a:rPr lang="en-GB" dirty="0"/>
+              <a:t> causes motivated reasoning, </a:t>
+            </a:r>
+            <a:r>
+              <a:rPr lang="en-GB" i="1" dirty="0"/>
+              <a:t>independent</a:t>
+            </a:r>
+            <a:r>
+              <a:rPr lang="en-GB" dirty="0"/>
+              <a:t> of: self-image, political identity, incentives and functional usefulness of beliefs</a:t>
+            </a:r>
+          </a:p>
+          <a:p>
+            <a:endParaRPr lang="en-DE" dirty="0"/>
+          </a:p>
+          <a:p>
             <a:endParaRPr lang="en-DE" dirty="0"/>
           </a:p>
         </p:txBody>
@@ -1700,7 +1817,7 @@
           <p:cNvPr id="4" name="Slide Number Placeholder 3">
             <a:extLst>
               <a:ext uri="{FF2B5EF4-FFF2-40B4-BE49-F238E27FC236}">
-                <a16:creationId xmlns:a16="http://schemas.microsoft.com/office/drawing/2014/main" id="{735EE59A-E30A-570A-5E9A-452AA8E41BE8}"/>
+                <a16:creationId xmlns:a16="http://schemas.microsoft.com/office/drawing/2014/main" id="{01432C89-20EC-91C6-E149-84C652744FD6}"/>
               </a:ext>
             </a:extLst>
           </p:cNvPr>
@@ -1727,7 +1844,7 @@
     </p:spTree>
     <p:extLst>
       <p:ext uri="{BB962C8B-B14F-4D97-AF65-F5344CB8AC3E}">
-        <p14:creationId xmlns:p14="http://schemas.microsoft.com/office/powerpoint/2010/main" val="619535107"/>
+        <p14:creationId xmlns:p14="http://schemas.microsoft.com/office/powerpoint/2010/main" val="4109201501"/>
       </p:ext>
     </p:extLst>
   </p:cSld>
@@ -4747,7 +4864,13 @@
   <p:cSld>
     <p:spTree>
       <p:nvGrpSpPr>
-        <p:cNvPr id="1" name=""/>
+        <p:cNvPr id="1" name="">
+          <a:extLst>
+            <a:ext uri="{FF2B5EF4-FFF2-40B4-BE49-F238E27FC236}">
+              <a16:creationId xmlns:a16="http://schemas.microsoft.com/office/drawing/2014/main" id="{08EE6743-AA5B-3BAC-CFF1-FC945AD3B0D0}"/>
+            </a:ext>
+          </a:extLst>
+        </p:cNvPr>
         <p:cNvGrpSpPr/>
         <p:nvPr/>
       </p:nvGrpSpPr>
@@ -4759,12 +4882,40 @@
           <a:chExt cx="0" cy="0"/>
         </a:xfrm>
       </p:grpSpPr>
+      <p:sp>
+        <p:nvSpPr>
+          <p:cNvPr id="2" name="Title 1">
+            <a:extLst>
+              <a:ext uri="{FF2B5EF4-FFF2-40B4-BE49-F238E27FC236}">
+                <a16:creationId xmlns:a16="http://schemas.microsoft.com/office/drawing/2014/main" id="{A9EBC2E0-9C72-A152-44A0-F133E03B80BF}"/>
+              </a:ext>
+            </a:extLst>
+          </p:cNvPr>
+          <p:cNvSpPr>
+            <a:spLocks noGrp="1"/>
+          </p:cNvSpPr>
+          <p:nvPr>
+            <p:ph type="title"/>
+          </p:nvPr>
+        </p:nvSpPr>
+        <p:spPr/>
+        <p:txBody>
+          <a:bodyPr/>
+          <a:lstStyle/>
+          <a:p>
+            <a:r>
+              <a:rPr lang="en-DE" dirty="0"/>
+              <a:t>Extension Mean Values</a:t>
+            </a:r>
+          </a:p>
+        </p:txBody>
+      </p:sp>
       <p:pic>
         <p:nvPicPr>
-          <p:cNvPr id="8" name="Picture 7" descr="A graph of different colored rectangular shapes&#10;&#10;AI-generated content may be incorrect.">
+          <p:cNvPr id="4" name="Picture 3" descr="A graph of different colored rectangular shapes&#10;&#10;AI-generated content may be incorrect.">
             <a:extLst>
               <a:ext uri="{FF2B5EF4-FFF2-40B4-BE49-F238E27FC236}">
-                <a16:creationId xmlns:a16="http://schemas.microsoft.com/office/drawing/2014/main" id="{00BF3EEA-86F6-5A2B-8AEF-50E3F97A2B50}"/>
+                <a16:creationId xmlns:a16="http://schemas.microsoft.com/office/drawing/2014/main" id="{0495E425-EED0-AD73-C220-AAE9A213B6EC}"/>
               </a:ext>
             </a:extLst>
           </p:cNvPr>
@@ -4781,8 +4932,8 @@
         </p:blipFill>
         <p:spPr>
           <a:xfrm>
-            <a:off x="1396079" y="121744"/>
-            <a:ext cx="8949487" cy="6614512"/>
+            <a:off x="2596112" y="1608937"/>
+            <a:ext cx="6999776" cy="5173492"/>
           </a:xfrm>
           <a:prstGeom prst="rect">
             <a:avLst/>
@@ -4792,7 +4943,7 @@
     </p:spTree>
     <p:extLst>
       <p:ext uri="{BB962C8B-B14F-4D97-AF65-F5344CB8AC3E}">
-        <p14:creationId xmlns:p14="http://schemas.microsoft.com/office/powerpoint/2010/main" val="1150516757"/>
+        <p14:creationId xmlns:p14="http://schemas.microsoft.com/office/powerpoint/2010/main" val="3049321989"/>
       </p:ext>
     </p:extLst>
   </p:cSld>
@@ -4807,13 +4958,7 @@
   <p:cSld>
     <p:spTree>
       <p:nvGrpSpPr>
-        <p:cNvPr id="1" name="">
-          <a:extLst>
-            <a:ext uri="{FF2B5EF4-FFF2-40B4-BE49-F238E27FC236}">
-              <a16:creationId xmlns:a16="http://schemas.microsoft.com/office/drawing/2014/main" id="{D9038F16-A74B-D157-7A79-31BC30588C8C}"/>
-            </a:ext>
-          </a:extLst>
-        </p:cNvPr>
+        <p:cNvPr id="1" name=""/>
         <p:cNvGrpSpPr/>
         <p:nvPr/>
       </p:nvGrpSpPr>
@@ -4827,10 +4972,10 @@
       </p:grpSpPr>
       <p:sp>
         <p:nvSpPr>
-          <p:cNvPr id="2" name="Title 1">
+          <p:cNvPr id="4" name="Title 3">
             <a:extLst>
               <a:ext uri="{FF2B5EF4-FFF2-40B4-BE49-F238E27FC236}">
-                <a16:creationId xmlns:a16="http://schemas.microsoft.com/office/drawing/2014/main" id="{54A786B3-B22A-C475-B8C6-4B02A5EBA9D3}"/>
+                <a16:creationId xmlns:a16="http://schemas.microsoft.com/office/drawing/2014/main" id="{D5DF4813-9192-8F11-9FB0-A7F8FE31C28B}"/>
               </a:ext>
             </a:extLst>
           </p:cNvPr>
@@ -4838,7 +4983,7 @@
             <a:spLocks noGrp="1"/>
           </p:cNvSpPr>
           <p:nvPr>
-            <p:ph type="title"/>
+            <p:ph type="ctrTitle"/>
           </p:nvPr>
         </p:nvSpPr>
         <p:spPr/>
@@ -4848,58 +4993,15 @@
           <a:p>
             <a:r>
               <a:rPr lang="en-DE" dirty="0"/>
-              <a:t>Verdict &amp; Hypothesis</a:t>
-            </a:r>
-          </a:p>
-        </p:txBody>
-      </p:sp>
-      <p:sp>
-        <p:nvSpPr>
-          <p:cNvPr id="4" name="Content Placeholder 3">
-            <a:extLst>
-              <a:ext uri="{FF2B5EF4-FFF2-40B4-BE49-F238E27FC236}">
-                <a16:creationId xmlns:a16="http://schemas.microsoft.com/office/drawing/2014/main" id="{ADCBA40C-CD97-B539-5821-26C7CFB800B5}"/>
-              </a:ext>
-            </a:extLst>
-          </p:cNvPr>
-          <p:cNvSpPr>
-            <a:spLocks noGrp="1"/>
-          </p:cNvSpPr>
-          <p:nvPr>
-            <p:ph idx="1"/>
-          </p:nvPr>
-        </p:nvSpPr>
-        <p:spPr/>
-        <p:txBody>
-          <a:bodyPr/>
-          <a:lstStyle/>
-          <a:p>
-            <a:r>
-              <a:rPr lang="en-DE" dirty="0"/>
-              <a:t>We see that people do not engage in motivated reasoning when receiving good news, they hold their beliefs  </a:t>
-            </a:r>
-          </a:p>
-          <a:p>
-            <a:pPr lvl="1"/>
-            <a:r>
-              <a:rPr lang="en-GB" dirty="0"/>
-              <a:t>Motivated reasoning does not arise from wanting the world to be good.</a:t>
-            </a:r>
-            <a:br>
-              <a:rPr lang="en-GB" dirty="0"/>
-            </a:br>
-            <a:r>
-              <a:rPr lang="en-GB" dirty="0"/>
-              <a:t>It arises when beliefs serve identity, ego, or strategic function.</a:t>
-            </a:r>
-            <a:endParaRPr lang="en-DE" dirty="0"/>
+              <a:t>Fin.</a:t>
+            </a:r>
           </a:p>
         </p:txBody>
       </p:sp>
     </p:spTree>
     <p:extLst>
       <p:ext uri="{BB962C8B-B14F-4D97-AF65-F5344CB8AC3E}">
-        <p14:creationId xmlns:p14="http://schemas.microsoft.com/office/powerpoint/2010/main" val="330628484"/>
+        <p14:creationId xmlns:p14="http://schemas.microsoft.com/office/powerpoint/2010/main" val="3987243699"/>
       </p:ext>
     </p:extLst>
   </p:cSld>
@@ -5770,6 +5872,36 @@
           </a:p>
         </p:txBody>
       </p:sp>
+      <p:pic>
+        <p:nvPicPr>
+          <p:cNvPr id="3" name="Picture 2">
+            <a:extLst>
+              <a:ext uri="{FF2B5EF4-FFF2-40B4-BE49-F238E27FC236}">
+                <a16:creationId xmlns:a16="http://schemas.microsoft.com/office/drawing/2014/main" id="{59BA7B92-207A-0782-D57C-6CA11BEFAB0C}"/>
+              </a:ext>
+            </a:extLst>
+          </p:cNvPr>
+          <p:cNvPicPr>
+            <a:picLocks noChangeAspect="1"/>
+          </p:cNvPicPr>
+          <p:nvPr/>
+        </p:nvPicPr>
+        <p:blipFill>
+          <a:blip r:embed="rId3"/>
+          <a:stretch>
+            <a:fillRect/>
+          </a:stretch>
+        </p:blipFill>
+        <p:spPr>
+          <a:xfrm>
+            <a:off x="9183674" y="3811889"/>
+            <a:ext cx="2758944" cy="2758944"/>
+          </a:xfrm>
+          <a:prstGeom prst="rect">
+            <a:avLst/>
+          </a:prstGeom>
+        </p:spPr>
+      </p:pic>
     </p:spTree>
     <p:extLst>
       <p:ext uri="{BB962C8B-B14F-4D97-AF65-F5344CB8AC3E}">
@@ -6395,36 +6527,6 @@
           </p:sp>
         </mc:Fallback>
       </mc:AlternateContent>
-      <p:pic>
-        <p:nvPicPr>
-          <p:cNvPr id="10" name="Picture 9">
-            <a:extLst>
-              <a:ext uri="{FF2B5EF4-FFF2-40B4-BE49-F238E27FC236}">
-                <a16:creationId xmlns:a16="http://schemas.microsoft.com/office/drawing/2014/main" id="{F925DCFB-101D-B869-DBAF-CEA34B949AF2}"/>
-              </a:ext>
-            </a:extLst>
-          </p:cNvPr>
-          <p:cNvPicPr>
-            <a:picLocks noChangeAspect="1"/>
-          </p:cNvPicPr>
-          <p:nvPr/>
-        </p:nvPicPr>
-        <p:blipFill>
-          <a:blip r:embed="rId5"/>
-          <a:stretch>
-            <a:fillRect/>
-          </a:stretch>
-        </p:blipFill>
-        <p:spPr>
-          <a:xfrm>
-            <a:off x="9433056" y="4151955"/>
-            <a:ext cx="2758944" cy="2758944"/>
-          </a:xfrm>
-          <a:prstGeom prst="rect">
-            <a:avLst/>
-          </a:prstGeom>
-        </p:spPr>
-      </p:pic>
     </p:spTree>
     <p:extLst>
       <p:ext uri="{BB962C8B-B14F-4D97-AF65-F5344CB8AC3E}">
@@ -6446,7 +6548,7 @@
         <p:cNvPr id="1" name="">
           <a:extLst>
             <a:ext uri="{FF2B5EF4-FFF2-40B4-BE49-F238E27FC236}">
-              <a16:creationId xmlns:a16="http://schemas.microsoft.com/office/drawing/2014/main" id="{2FED652F-BD4D-ED46-0E6D-6FA8DE96A9A2}"/>
+              <a16:creationId xmlns:a16="http://schemas.microsoft.com/office/drawing/2014/main" id="{A13EF7B6-3269-D8D1-D6D1-FDE505BC6CDE}"/>
             </a:ext>
           </a:extLst>
         </p:cNvPr>
@@ -6461,12 +6563,40 @@
           <a:chExt cx="0" cy="0"/>
         </a:xfrm>
       </p:grpSpPr>
+      <p:sp>
+        <p:nvSpPr>
+          <p:cNvPr id="2" name="Title 1">
+            <a:extLst>
+              <a:ext uri="{FF2B5EF4-FFF2-40B4-BE49-F238E27FC236}">
+                <a16:creationId xmlns:a16="http://schemas.microsoft.com/office/drawing/2014/main" id="{74263387-D2D5-3615-C402-A7C687A48728}"/>
+              </a:ext>
+            </a:extLst>
+          </p:cNvPr>
+          <p:cNvSpPr>
+            <a:spLocks noGrp="1"/>
+          </p:cNvSpPr>
+          <p:nvPr>
+            <p:ph type="title"/>
+          </p:nvPr>
+        </p:nvSpPr>
+        <p:spPr/>
+        <p:txBody>
+          <a:bodyPr/>
+          <a:lstStyle/>
+          <a:p>
+            <a:r>
+              <a:rPr lang="en-DE" dirty="0"/>
+              <a:t>Regression Replication</a:t>
+            </a:r>
+          </a:p>
+        </p:txBody>
+      </p:sp>
       <p:pic>
         <p:nvPicPr>
-          <p:cNvPr id="5" name="Picture 4" descr="A graph on a black background&#10;&#10;AI-generated content may be incorrect.">
+          <p:cNvPr id="7" name="Picture 6" descr="A graph on a black background&#10;&#10;AI-generated content may be incorrect.">
             <a:extLst>
               <a:ext uri="{FF2B5EF4-FFF2-40B4-BE49-F238E27FC236}">
-                <a16:creationId xmlns:a16="http://schemas.microsoft.com/office/drawing/2014/main" id="{B862901F-274B-49BA-0CA1-F4DEB9BCD693}"/>
+                <a16:creationId xmlns:a16="http://schemas.microsoft.com/office/drawing/2014/main" id="{1C6519C2-9586-BFB2-E67B-58D5AA5C3CE5}"/>
               </a:ext>
             </a:extLst>
           </p:cNvPr>
@@ -6483,8 +6613,8 @@
         </p:blipFill>
         <p:spPr>
           <a:xfrm>
-            <a:off x="1676715" y="162733"/>
-            <a:ext cx="8838570" cy="6532534"/>
+            <a:off x="2702423" y="1690688"/>
+            <a:ext cx="6787153" cy="5016344"/>
           </a:xfrm>
           <a:prstGeom prst="rect">
             <a:avLst/>
@@ -6494,7 +6624,7 @@
     </p:spTree>
     <p:extLst>
       <p:ext uri="{BB962C8B-B14F-4D97-AF65-F5344CB8AC3E}">
-        <p14:creationId xmlns:p14="http://schemas.microsoft.com/office/powerpoint/2010/main" val="2841117719"/>
+        <p14:creationId xmlns:p14="http://schemas.microsoft.com/office/powerpoint/2010/main" val="3245014333"/>
       </p:ext>
     </p:extLst>
   </p:cSld>
@@ -6512,7 +6642,7 @@
         <p:cNvPr id="1" name="">
           <a:extLst>
             <a:ext uri="{FF2B5EF4-FFF2-40B4-BE49-F238E27FC236}">
-              <a16:creationId xmlns:a16="http://schemas.microsoft.com/office/drawing/2014/main" id="{15B6B3E9-FAEB-19E9-B202-E5907696B169}"/>
+              <a16:creationId xmlns:a16="http://schemas.microsoft.com/office/drawing/2014/main" id="{7C073861-AA49-54B9-C6E4-B404D9BE1022}"/>
             </a:ext>
           </a:extLst>
         </p:cNvPr>
@@ -6527,12 +6657,40 @@
           <a:chExt cx="0" cy="0"/>
         </a:xfrm>
       </p:grpSpPr>
+      <p:sp>
+        <p:nvSpPr>
+          <p:cNvPr id="2" name="Title 1">
+            <a:extLst>
+              <a:ext uri="{FF2B5EF4-FFF2-40B4-BE49-F238E27FC236}">
+                <a16:creationId xmlns:a16="http://schemas.microsoft.com/office/drawing/2014/main" id="{0BF8B810-D92D-7086-0B51-319E3E62968C}"/>
+              </a:ext>
+            </a:extLst>
+          </p:cNvPr>
+          <p:cNvSpPr>
+            <a:spLocks noGrp="1"/>
+          </p:cNvSpPr>
+          <p:nvPr>
+            <p:ph type="title"/>
+          </p:nvPr>
+        </p:nvSpPr>
+        <p:spPr/>
+        <p:txBody>
+          <a:bodyPr/>
+          <a:lstStyle/>
+          <a:p>
+            <a:r>
+              <a:rPr lang="en-DE" dirty="0"/>
+              <a:t>Extension Regression</a:t>
+            </a:r>
+          </a:p>
+        </p:txBody>
+      </p:sp>
       <p:pic>
         <p:nvPicPr>
           <p:cNvPr id="3" name="Picture 2" descr="A screen shot of a graph&#10;&#10;AI-generated content may be incorrect.">
             <a:extLst>
               <a:ext uri="{FF2B5EF4-FFF2-40B4-BE49-F238E27FC236}">
-                <a16:creationId xmlns:a16="http://schemas.microsoft.com/office/drawing/2014/main" id="{D27ECE07-846D-1FE1-9530-E24CEA8FB3EC}"/>
+                <a16:creationId xmlns:a16="http://schemas.microsoft.com/office/drawing/2014/main" id="{C7199E07-6880-D9E3-6685-D5760FA1AB0F}"/>
               </a:ext>
             </a:extLst>
           </p:cNvPr>
@@ -6549,8 +6707,8 @@
         </p:blipFill>
         <p:spPr>
           <a:xfrm>
-            <a:off x="1970179" y="379631"/>
-            <a:ext cx="8251641" cy="6098738"/>
+            <a:off x="2657632" y="1690688"/>
+            <a:ext cx="6876736" cy="5082554"/>
           </a:xfrm>
           <a:prstGeom prst="rect">
             <a:avLst/>
@@ -6560,7 +6718,7 @@
     </p:spTree>
     <p:extLst>
       <p:ext uri="{BB962C8B-B14F-4D97-AF65-F5344CB8AC3E}">
-        <p14:creationId xmlns:p14="http://schemas.microsoft.com/office/powerpoint/2010/main" val="942053188"/>
+        <p14:creationId xmlns:p14="http://schemas.microsoft.com/office/powerpoint/2010/main" val="173851639"/>
       </p:ext>
     </p:extLst>
   </p:cSld>

--- a/replication_presentation.pptx
+++ b/replication_presentation.pptx
@@ -4748,7 +4748,7 @@
         </p:nvPicPr>
         <p:blipFill>
           <a:blip r:embed="rId3">
-            <a:alphaModFix amt="40000"/>
+            <a:alphaModFix amt="20000"/>
           </a:blip>
           <a:srcRect t="13279" b="2451"/>
           <a:stretch>
@@ -4841,7 +4841,7 @@
             </a:pPr>
             <a:r>
               <a:rPr lang="en-US" sz="3200" dirty="0"/>
-              <a:t>What do you think, do you trust good news more than bad news ? </a:t>
+              <a:t>Do you trust good news more than bad news ? </a:t>
             </a:r>
           </a:p>
         </p:txBody>
@@ -4912,10 +4912,10 @@
       </p:sp>
       <p:pic>
         <p:nvPicPr>
-          <p:cNvPr id="4" name="Picture 3" descr="A graph of different colored rectangular shapes&#10;&#10;AI-generated content may be incorrect.">
+          <p:cNvPr id="6" name="Picture 5" descr="A graph of different colored rectangular shapes&#10;&#10;AI-generated content may be incorrect.">
             <a:extLst>
               <a:ext uri="{FF2B5EF4-FFF2-40B4-BE49-F238E27FC236}">
-                <a16:creationId xmlns:a16="http://schemas.microsoft.com/office/drawing/2014/main" id="{0495E425-EED0-AD73-C220-AAE9A213B6EC}"/>
+                <a16:creationId xmlns:a16="http://schemas.microsoft.com/office/drawing/2014/main" id="{0C952F8E-E36F-28B2-E652-555FBAF2850E}"/>
               </a:ext>
             </a:extLst>
           </p:cNvPr>
@@ -4932,8 +4932,8 @@
         </p:blipFill>
         <p:spPr>
           <a:xfrm>
-            <a:off x="2596112" y="1608937"/>
-            <a:ext cx="6999776" cy="5173492"/>
+            <a:off x="2524321" y="1578387"/>
+            <a:ext cx="7143358" cy="5279613"/>
           </a:xfrm>
           <a:prstGeom prst="rect">
             <a:avLst/>
